--- a/Curriculo/Fase3_Basico2/decks/Basico2_S04_Jay.pptx
+++ b/Curriculo/Fase3_Basico2/decks/Basico2_S04_Jay.pptx
@@ -136,7 +136,7 @@
   <p:extLst>
     <p:ext uri="{521415D9-36F7-43E2-AB2F-B90AF26B5E84}">
       <p14:sectionLst xmlns:p14="http://schemas.microsoft.com/office/powerpoint/2010/main">
-        <p14:section name="Semana 4" id="{2BFCE969-0D79-6D40-184B-4998ADDAE867}">
+        <p14:section name="Semana 4" id="{CEA05433-0292-39C5-7F8B-ADED3F0447F7}">
           <p14:sldIdLst>
             <p14:sldId id="256"/>
             <p14:sldId id="257"/>
@@ -204,7 +204,7 @@
     </p:spTree>
     <p:extLst>
       <p:ext uri="{BB962C8B-B14F-4D97-AF65-F5344CB8AC3E}">
-        <p14:creationId xmlns:p14="http://schemas.microsoft.com/office/powerpoint/2010/main" val="681049616"/>
+        <p14:creationId xmlns:p14="http://schemas.microsoft.com/office/powerpoint/2010/main" val="1359845677"/>
       </p:ext>
     </p:extLst>
   </p:cSld>
@@ -529,7 +529,7 @@
             <a:r>
               <a:rPr lang="en-US" dirty="0"/>
               <a:t>21:10–21:11 · 1 min. «¿Y si el verbo es nuevo y solo lo tienes en diccionario? Mira la última vocal de la raíz. Si es ㅏ u ㅗ, mano arriba: -았어요. Si es otra: -었어요. Y 하다, siempre 했어요.» «¿먹다 tiene ㅏ o ㅗ? No. Entonces 먹었어요. Nunca 먹았어요.» Coro con el gesto.
-Imagen sugerida: Ícono de una mano levantada junto a ㅏ / ㅗ
+Imagen: incluida (dibujo de la casa).
 Fuente: A1_Nivel_1/09_Pasado/Sesion_09_Pasado.pptx L3, adaptada: sin coral, sin romanización «-eosseoyo / -asseoyo», sin voseo, sin «Cero memorización de irregulares»
 Lámina 11</a:t>
             </a:r>
@@ -1153,7 +1153,7 @@
             <a:r>
               <a:rPr lang="en-US" dirty="0"/>
               <a:t>21:19–21:21 · 2 min. «우리 수업은 몇 시부터 몇 시까지예요?» (señalas el reloj; → 아홉 시부터 열 시까지!) «네! 밤 아홉 시부터 열 시까지예요.» «부터 = desde, para tiempo. 까지 = hasta, para tiempo y lugar. Para ‘desde’ un lugar, el 에서 de la semana 3, ahora como punto de partida. Cada uno puede ir solo. Y nada de 에 delante.» «까지. 따라 하세요: 까지!» «ㄲ apretada, sin aire. Si dicen [가지], dijeron ‘berenjena’.»
-Imagen sugerida: Reloj 21:00–22:00 (nuestra clase) y mapa de Corea con una flecha 서울 → 부산; dibujo de una berenjena junto a 가지
+Imagen: incluida (dibujo de la casa).
 Fuente: A1_Nivel_1/07_Rutina_Diaria/Sesion_07_Rutina_Diaria_v2.pptx L12, corregida: 서울부터 부산까지 → 서울에서 부산까지; sin «Uno solo no funciona»; sin «buteo...kkaji»; amarillo y coral → azul/navy
 Lámina 18</a:t>
             </a:r>
@@ -1332,7 +1332,7 @@
             <a:r>
               <a:rPr lang="en-US" dirty="0"/>
               <a:t>21:00–21:02:30 · 2,5 min. Antes de hablar, chat en «solo anfitrión». «Quiz 3: cinco preguntas, en un solo mensaje, así: 1) … 5). Como siempre, el chat me llega solo a mí.» Mientras escriben, crea las 5 salas y asigna a mano con tu lista de tríos. A las 21:02:30, «끝!»: guarda el chat y vuelve a ponerlo en «todos».
-Imagen sugerida: Cartel del ítem 5 dibujado como aviso de café: 카페 한강 · 화요일 ~ 일요일 · 오전 8:00 ~ 오후 10:00 · 월요일은 쉽니다.
+Imagen: incluida (dibujo de la casa).
 Fuente: Nueva (ítem 5 original estilo TOPIK I, tipo aviso; revisar D-12 / S4-9)
 Lámina 2</a:t>
             </a:r>
@@ -1600,7 +1600,7 @@
             <a:r>
               <a:rPr lang="en-US" dirty="0"/>
               <a:t>21:27–21:30 · 3 min. «En Seúl, el lunes, alguien te va a preguntar 주말 잘 보냈어요? Es cortesía: no esperan un relato, solo una o dos cosas concretas.» Hay cafés en todas partes (palabra que se oye: 카공, de 카페 + 공부; revisar S4-6) y «me quedé descansando en casa» es perfecto, sin culpa. Coro de la frase ancla dos veces (tú preguntas, el grupo responde; después al revés) y 2 alumnos responden con su fin de semana. Di «muchos», «en Seúl»; nunca «los coreanos».
-Imagen sugerida: Foto de un café de Seúl (licencia libre, sin marcas)
+Imagen: incluida (dibujo de la casa).
 Fuente: Nueva
 Lámina 22</a:t>
             </a:r>
@@ -2580,7 +2580,6 @@
             <a:r>
               <a:rPr lang="en-US" dirty="0"/>
               <a:t>21:05 · 10 s (L5 + L6 = 20 s en total). Con la portada en pantalla: «Hoy, el pasado: al final de la clase vas a contar tu fin de semana.» Todavía no expliques nada. Pasa directo a L6 (las 5 frases) y, después, pregunta en coreano «여러분, 주말 잘 보냈어요?» para entrar al fin de semana de Jay (L7).
-Imagen sugerida: Logo azul de Academia Seúl (portada de la plantilla)
 Fuente: Portada de la plantilla (no usar la portada de julio, que dice «Profesora · Jay Kim»)
 Lámina 5</a:t>
             </a:r>
@@ -2759,7 +2758,7 @@
             <a:r>
               <a:rPr lang="en-US" dirty="0"/>
               <a:t>21:06–21:07. Una frase por foto, despacio, señalando; haz clic para que la frase aparezca después de decirla. Es un guion de ejemplo (revisar S4-2): cámbialo por tu fin de semana real (sáb 31 oct – dom 1 nov) y conserva un 부터~까지, un 하고 y un adjetivo (맛있었어요 / 피곤했어요).
-Imagen sugerida: Fotos 1–3 del fin de semana de Jay (las elige Jay, propias o con licencia libre): parque · café · amigo + comida
+Imagen: incluida (dibujo de la casa).
 Fuente: Nueva (fotos de Jay)
 Lámina 7</a:t>
             </a:r>
@@ -2849,7 +2848,7 @@
             <a:r>
               <a:rPr lang="en-US" dirty="0"/>
               <a:t>21:07–21:08. Fotos 4 a 6, igual que en L7. Comprensión (40 s), en coreano; acepta respuestas de una palabra (운동! · 친구하고!). Cierra: «Todo eso fue pasado, y lo entendieron sin que les explicara nada. Ahora vemos cómo se arma.» Si vas atrasado: 4 fotos y una sola pregunta.
-Imagen sugerida: Fotos 4–6 del fin de semana de Jay: libro · sofá · cocina
+Imagen: incluida (dibujo de la casa).
 Fuente: Nueva; idea de A1_Nivel_1/09_Pasado/Sesion_09_Pasado.pptx L10 (sin su frase con -아서)
 Lámina 8</a:t>
             </a:r>
@@ -2939,7 +2938,7 @@
             <a:r>
               <a:rPr lang="en-US" dirty="0"/>
               <a:t>21:08–21:09 · 1 min. Vista de galería. «Si oyes presente, un dedo a la cámara; si oyes pasado, dos.» Di: 가요 · 갔어요 · 먹어요 · 먹었어요 · 봐요 · 했어요 · 샀어요 · 쉬어요. Después: «¿Qué tiene el pasado que no tiene el presente? Una ㅆ apretada: [가써요], [해써요]. Esa es la marca.» Sin cámara: 1 o 2 en el chat.
-Imagen sugerida: Dos manos dibujadas: una con 1 dedo (presente) y otra con 2 dedos (pasado)
+Imagen: incluida (dibujo de la casa).
 Fuente: Nueva
 Lámina 9</a:t>
             </a:r>
@@ -4394,7 +4393,7 @@
         <p:spPr>
           <a:xfrm>
             <a:off x="548640" y="1325880"/>
-            <a:ext cx="11064240" cy="457200"/>
+            <a:ext cx="11091672" cy="457200"/>
           </a:xfrm>
           <a:prstGeom prst="rect">
             <a:avLst/>
@@ -4500,7 +4499,7 @@
           <p:nvPr>
             <p:extLst>
               <p:ext uri="{D42A27DB-BD31-4B8C-83A1-F6EECF244321}">
-                <p14:modId xmlns:p14="http://schemas.microsoft.com/office/powerpoint/2010/main" val="2878358020"/>
+                <p14:modId xmlns:p14="http://schemas.microsoft.com/office/powerpoint/2010/main" val="3386344859"/>
               </p:ext>
             </p:extLst>
           </p:nvPr>
@@ -6372,16 +6371,40 @@
           </a:p>
         </p:txBody>
       </p:sp>
-      <p:sp>
-        <p:nvSpPr>
-          <p:cNvPr id="3" name="Text 1"/>
+      <p:pic>
+        <p:nvPicPr>
+          <p:cNvPr id="3" name="imagen" descr="C:\Users\Chingu\AppData\Local\Temp\claude\C--Users-Chingu-Desktop-ACADEMIASEULWEB\d4111e1b-5523-44ea-97b2-b1a1d9545b9e\scratchpad\decks\cache\img_b59bcd9725c39447.png"/>
+          <p:cNvPicPr>
+            <a:picLocks noChangeAspect="1"/>
+          </p:cNvPicPr>
+          <p:nvPr/>
+        </p:nvPicPr>
+        <p:blipFill>
+          <a:blip r:embed="rId3"/>
+          <a:stretch>
+            <a:fillRect/>
+          </a:stretch>
+        </p:blipFill>
+        <p:spPr>
+          <a:xfrm>
+            <a:off x="7754112" y="1508760"/>
+            <a:ext cx="3886200" cy="4480560"/>
+          </a:xfrm>
+          <a:prstGeom prst="rect">
+            <a:avLst/>
+          </a:prstGeom>
+        </p:spPr>
+      </p:pic>
+      <p:sp>
+        <p:nvSpPr>
+          <p:cNvPr id="4" name="Text 1"/>
           <p:cNvSpPr txBox="1"/>
           <p:nvPr/>
         </p:nvSpPr>
         <p:spPr>
           <a:xfrm>
             <a:off x="548640" y="1325880"/>
-            <a:ext cx="11064240" cy="457200"/>
+            <a:ext cx="6931152" cy="457200"/>
           </a:xfrm>
           <a:prstGeom prst="rect">
             <a:avLst/>
@@ -6430,35 +6453,35 @@
           <p:nvPr>
             <p:extLst>
               <p:ext uri="{D42A27DB-BD31-4B8C-83A1-F6EECF244321}">
-                <p14:modId xmlns:p14="http://schemas.microsoft.com/office/powerpoint/2010/main" val="2752770415"/>
+                <p14:modId xmlns:p14="http://schemas.microsoft.com/office/powerpoint/2010/main" val="3238273321"/>
               </p:ext>
             </p:extLst>
           </p:nvPr>
         </p:nvGraphicFramePr>
         <p:xfrm>
           <a:off x="548640" y="1874520"/>
-          <a:ext cx="11091672" cy="914400"/>
+          <a:ext cx="6931152" cy="914400"/>
         </p:xfrm>
         <a:graphic>
           <a:graphicData uri="http://schemas.openxmlformats.org/drawingml/2006/table">
             <a:tbl>
               <a:tblPr/>
               <a:tblGrid>
-                <a:gridCol w="3697224">
+                <a:gridCol w="2310384">
                   <a:extLst>
                     <a:ext uri="{9D8B030D-6E8A-4147-A177-3AD203B41FA5}">
                       <a16:colId xmlns:a16="http://schemas.microsoft.com/office/drawing/2014/main" val="20000"/>
                     </a:ext>
                   </a:extLst>
                 </a:gridCol>
-                <a:gridCol w="3697224">
+                <a:gridCol w="2310384">
                   <a:extLst>
                     <a:ext uri="{9D8B030D-6E8A-4147-A177-3AD203B41FA5}">
                       <a16:colId xmlns:a16="http://schemas.microsoft.com/office/drawing/2014/main" val="20001"/>
                     </a:ext>
                   </a:extLst>
                 </a:gridCol>
-                <a:gridCol w="3697224">
+                <a:gridCol w="2310384">
                   <a:extLst>
                     <a:ext uri="{9D8B030D-6E8A-4147-A177-3AD203B41FA5}">
                       <a16:colId xmlns:a16="http://schemas.microsoft.com/office/drawing/2014/main" val="20002"/>
@@ -7808,7 +7831,7 @@
         <p:spPr>
           <a:xfrm>
             <a:off x="548640" y="1325880"/>
-            <a:ext cx="11064240" cy="457200"/>
+            <a:ext cx="11091672" cy="457200"/>
           </a:xfrm>
           <a:prstGeom prst="rect">
             <a:avLst/>
@@ -7846,7 +7869,7 @@
           <p:nvPr>
             <p:extLst>
               <p:ext uri="{D42A27DB-BD31-4B8C-83A1-F6EECF244321}">
-                <p14:modId xmlns:p14="http://schemas.microsoft.com/office/powerpoint/2010/main" val="3330164768"/>
+                <p14:modId xmlns:p14="http://schemas.microsoft.com/office/powerpoint/2010/main" val="2203676796"/>
               </p:ext>
             </p:extLst>
           </p:nvPr>
@@ -9901,7 +9924,7 @@
         <p:spPr>
           <a:xfrm>
             <a:off x="548640" y="1325880"/>
-            <a:ext cx="11064240" cy="457200"/>
+            <a:ext cx="11091672" cy="457200"/>
           </a:xfrm>
           <a:prstGeom prst="rect">
             <a:avLst/>
@@ -10544,7 +10567,7 @@
         <p:spPr>
           <a:xfrm>
             <a:off x="548640" y="1325880"/>
-            <a:ext cx="11064240" cy="457200"/>
+            <a:ext cx="11091672" cy="457200"/>
           </a:xfrm>
           <a:prstGeom prst="rect">
             <a:avLst/>
@@ -10650,7 +10673,7 @@
           <p:nvPr>
             <p:extLst>
               <p:ext uri="{D42A27DB-BD31-4B8C-83A1-F6EECF244321}">
-                <p14:modId xmlns:p14="http://schemas.microsoft.com/office/powerpoint/2010/main" val="2449558332"/>
+                <p14:modId xmlns:p14="http://schemas.microsoft.com/office/powerpoint/2010/main" val="3952557176"/>
               </p:ext>
             </p:extLst>
           </p:nvPr>
@@ -11728,8 +11751,8 @@
         </p:nvSpPr>
         <p:spPr>
           <a:xfrm>
-            <a:off x="1463040" y="3657600"/>
-            <a:ext cx="9262872" cy="822960"/>
+            <a:off x="1783080" y="3657600"/>
+            <a:ext cx="8439912" cy="822960"/>
           </a:xfrm>
           <a:prstGeom prst="rect">
             <a:avLst/>
@@ -11952,7 +11975,7 @@
         <p:spPr>
           <a:xfrm>
             <a:off x="548640" y="1325880"/>
-            <a:ext cx="11064240" cy="457200"/>
+            <a:ext cx="11091672" cy="457200"/>
           </a:xfrm>
           <a:prstGeom prst="rect">
             <a:avLst/>
@@ -12840,7 +12863,7 @@
               <a:buChar char="•"/>
             </a:pPr>
             <a:r>
-              <a:rPr lang="ko-KR" altLang="en-US" sz="2400" dirty="0">
+              <a:rPr lang="ko-KR" altLang="en-US" sz="2800" dirty="0">
                 <a:solidFill>
                   <a:srgbClr val="14142B"/>
                 </a:solidFill>
@@ -12851,14 +12874,14 @@
               <a:t>밥을 먹고 커피를 마셨어요</a:t>
             </a:r>
             <a:r>
-              <a:rPr lang="en-US" sz="2400" dirty="0">
+              <a:rPr lang="en-US" sz="2800" dirty="0">
                 <a:solidFill>
                   <a:srgbClr val="14142B"/>
                 </a:solidFill>
               </a:rPr>
               <a:t>.</a:t>
             </a:r>
-            <a:endParaRPr lang="en-US" sz="2400" dirty="0"/>
+            <a:endParaRPr lang="en-US" sz="2800" dirty="0"/>
           </a:p>
           <a:p>
             <a:pPr marL="228600" indent="-228600" eaLnBrk="1">
@@ -12869,7 +12892,7 @@
               <a:buChar char="•"/>
             </a:pPr>
             <a:r>
-              <a:rPr lang="ko-KR" altLang="en-US" sz="2400" dirty="0">
+              <a:rPr lang="ko-KR" altLang="en-US" sz="2800" dirty="0">
                 <a:solidFill>
                   <a:srgbClr val="14142B"/>
                 </a:solidFill>
@@ -12880,14 +12903,14 @@
               <a:t>친구를 만나고 영화를 봤어요</a:t>
             </a:r>
             <a:r>
-              <a:rPr lang="en-US" sz="2400" dirty="0">
+              <a:rPr lang="en-US" sz="2800" dirty="0">
                 <a:solidFill>
                   <a:srgbClr val="14142B"/>
                 </a:solidFill>
               </a:rPr>
               <a:t>.</a:t>
             </a:r>
-            <a:endParaRPr lang="en-US" sz="2400" dirty="0"/>
+            <a:endParaRPr lang="en-US" sz="2800" dirty="0"/>
           </a:p>
           <a:p>
             <a:pPr marL="228600" indent="-228600" eaLnBrk="1">
@@ -12898,7 +12921,7 @@
               <a:buChar char="•"/>
             </a:pPr>
             <a:r>
-              <a:rPr lang="ko-KR" altLang="en-US" sz="2400" dirty="0">
+              <a:rPr lang="ko-KR" altLang="en-US" sz="2800" dirty="0">
                 <a:solidFill>
                   <a:srgbClr val="14142B"/>
                 </a:solidFill>
@@ -12909,7 +12932,7 @@
               <a:t>El primer verbo va sin tiempo: 먹고 </a:t>
             </a:r>
             <a:r>
-              <a:rPr lang="en-US" sz="2400" dirty="0">
+              <a:rPr lang="en-US" sz="2800" dirty="0">
                 <a:solidFill>
                   <a:srgbClr val="14142B"/>
                 </a:solidFill>
@@ -12917,7 +12940,7 @@
               <a:t>+ </a:t>
             </a:r>
             <a:r>
-              <a:rPr lang="ko-KR" altLang="en-US" sz="2400" dirty="0">
+              <a:rPr lang="ko-KR" altLang="en-US" sz="2800" dirty="0">
                 <a:solidFill>
                   <a:srgbClr val="14142B"/>
                 </a:solidFill>
@@ -12927,7 +12950,7 @@
               </a:rPr>
               <a:t>마셨어요</a:t>
             </a:r>
-            <a:endParaRPr lang="en-US" sz="2400" dirty="0"/>
+            <a:endParaRPr lang="en-US" sz="2800" dirty="0"/>
           </a:p>
           <a:p>
             <a:pPr marL="228600" indent="-228600" eaLnBrk="1">
@@ -12938,14 +12961,14 @@
               <a:buChar char="•"/>
             </a:pPr>
             <a:r>
-              <a:rPr lang="en-US" sz="2400" dirty="0">
+              <a:rPr lang="en-US" sz="2800" dirty="0">
                 <a:solidFill>
                   <a:srgbClr val="14142B"/>
                 </a:solidFill>
               </a:rPr>
               <a:t>No es obligatorio: dos frases cortas también están perfectas</a:t>
             </a:r>
-            <a:endParaRPr lang="en-US" sz="2400" dirty="0"/>
+            <a:endParaRPr lang="en-US" sz="2800" dirty="0"/>
           </a:p>
         </p:txBody>
       </p:sp>
@@ -13190,7 +13213,7 @@
         <p:spPr>
           <a:xfrm>
             <a:off x="548640" y="1325880"/>
-            <a:ext cx="11064240" cy="457200"/>
+            <a:ext cx="11091672" cy="457200"/>
           </a:xfrm>
           <a:prstGeom prst="rect">
             <a:avLst/>
@@ -13284,15 +13307,39 @@
           </a:p>
         </p:txBody>
       </p:sp>
-      <p:sp>
-        <p:nvSpPr>
-          <p:cNvPr id="6" name="Text 4"/>
+      <p:pic>
+        <p:nvPicPr>
+          <p:cNvPr id="6" name="col_img_0" descr="C:\Users\Chingu\AppData\Local\Temp\claude\C--Users-Chingu-Desktop-ACADEMIASEULWEB\d4111e1b-5523-44ea-97b2-b1a1d9545b9e\scratchpad\decks\cache\img_87b03a14e1d53549.png"/>
+          <p:cNvPicPr>
+            <a:picLocks noChangeAspect="1"/>
+          </p:cNvPicPr>
+          <p:nvPr/>
+        </p:nvPicPr>
+        <p:blipFill>
+          <a:blip r:embed="rId3"/>
+          <a:stretch>
+            <a:fillRect/>
+          </a:stretch>
+        </p:blipFill>
+        <p:spPr>
+          <a:xfrm>
+            <a:off x="2487168" y="2651760"/>
+            <a:ext cx="1508760" cy="685800"/>
+          </a:xfrm>
+          <a:prstGeom prst="rect">
+            <a:avLst/>
+          </a:prstGeom>
+        </p:spPr>
+      </p:pic>
+      <p:sp>
+        <p:nvSpPr>
+          <p:cNvPr id="7" name="Text 4"/>
           <p:cNvSpPr txBox="1"/>
           <p:nvPr/>
         </p:nvSpPr>
         <p:spPr>
           <a:xfrm>
-            <a:off x="777240" y="2651760"/>
+            <a:off x="777240" y="3429000"/>
             <a:ext cx="4928616" cy="914400"/>
           </a:xfrm>
           <a:prstGeom prst="rect">
@@ -13346,14 +13393,14 @@
       </p:sp>
       <p:sp>
         <p:nvSpPr>
-          <p:cNvPr id="7" name="lista"/>
+          <p:cNvPr id="8" name="lista"/>
           <p:cNvSpPr txBox="1"/>
           <p:nvPr/>
         </p:nvSpPr>
         <p:spPr>
           <a:xfrm>
-            <a:off x="731520" y="3657600"/>
-            <a:ext cx="5020056" cy="2377440"/>
+            <a:off x="731520" y="4434840"/>
+            <a:ext cx="5020056" cy="1600200"/>
           </a:xfrm>
           <a:prstGeom prst="rect">
             <a:avLst/>
@@ -13375,7 +13422,7 @@
               <a:buChar char="•"/>
             </a:pPr>
             <a:r>
-              <a:rPr lang="ko-KR" altLang="en-US" sz="2000" dirty="0">
+              <a:rPr lang="ko-KR" altLang="en-US" sz="1900" dirty="0">
                 <a:solidFill>
                   <a:srgbClr val="14142B"/>
                 </a:solidFill>
@@ -13383,17 +13430,17 @@
                 <a:ea typeface="Malgun Gothic" pitchFamily="34" charset="-122"/>
                 <a:cs typeface="Malgun Gothic" pitchFamily="34" charset="-120"/>
               </a:rPr>
-              <a:t>밤 아홉 시부터 열 시까지 </a:t>
-            </a:r>
-            <a:r>
-              <a:rPr lang="en-US" sz="2000" dirty="0">
+              <a:t>밤 아홉 시부터 열 시까지 </a:t>
+            </a:r>
+            <a:r>
+              <a:rPr lang="en-US" sz="1900" dirty="0">
                 <a:solidFill>
                   <a:srgbClr val="14142B"/>
                 </a:solidFill>
               </a:rPr>
               <a:t>(nuestra clase)</a:t>
             </a:r>
-            <a:endParaRPr lang="en-US" sz="2000" dirty="0"/>
+            <a:endParaRPr lang="en-US" sz="1900" dirty="0"/>
           </a:p>
           <a:p>
             <a:pPr marL="228600" indent="-228600" eaLnBrk="1">
@@ -13404,7 +13451,7 @@
               <a:buChar char="•"/>
             </a:pPr>
             <a:r>
-              <a:rPr lang="ko-KR" altLang="en-US" sz="2000" dirty="0">
+              <a:rPr lang="ko-KR" altLang="en-US" sz="1900" dirty="0">
                 <a:solidFill>
                   <a:srgbClr val="14142B"/>
                 </a:solidFill>
@@ -13415,7 +13462,7 @@
               <a:t>부터 </a:t>
             </a:r>
             <a:r>
-              <a:rPr lang="en-US" sz="2000" dirty="0">
+              <a:rPr lang="en-US" sz="1900" dirty="0">
                 <a:solidFill>
                   <a:srgbClr val="14142B"/>
                 </a:solidFill>
@@ -13423,7 +13470,7 @@
               <a:t>= desde · </a:t>
             </a:r>
             <a:r>
-              <a:rPr lang="ko-KR" altLang="en-US" sz="2000" dirty="0">
+              <a:rPr lang="ko-KR" altLang="en-US" sz="1900" dirty="0">
                 <a:solidFill>
                   <a:srgbClr val="14142B"/>
                 </a:solidFill>
@@ -13434,14 +13481,14 @@
               <a:t>까지 </a:t>
             </a:r>
             <a:r>
-              <a:rPr lang="en-US" sz="2000" dirty="0">
+              <a:rPr lang="en-US" sz="1900" dirty="0">
                 <a:solidFill>
                   <a:srgbClr val="14142B"/>
                 </a:solidFill>
               </a:rPr>
               <a:t>= hasta</a:t>
             </a:r>
-            <a:endParaRPr lang="en-US" sz="2000" dirty="0"/>
+            <a:endParaRPr lang="en-US" sz="1900" dirty="0"/>
           </a:p>
           <a:p>
             <a:pPr marL="228600" indent="-228600" eaLnBrk="1">
@@ -13452,7 +13499,7 @@
               <a:buChar char="•"/>
             </a:pPr>
             <a:r>
-              <a:rPr lang="ko-KR" altLang="en-US" sz="2000" dirty="0">
+              <a:rPr lang="ko-KR" altLang="en-US" sz="1900" dirty="0">
                 <a:solidFill>
                   <a:srgbClr val="14142B"/>
                 </a:solidFill>
@@ -13460,10 +13507,10 @@
                 <a:ea typeface="Malgun Gothic" pitchFamily="34" charset="-122"/>
                 <a:cs typeface="Malgun Gothic" pitchFamily="34" charset="-120"/>
               </a:rPr>
-              <a:t>Solos: 여섯 시까지 </a:t>
-            </a:r>
-            <a:r>
-              <a:rPr lang="en-US" sz="2000" dirty="0">
+              <a:t>Solos: 여섯 시까지 </a:t>
+            </a:r>
+            <a:r>
+              <a:rPr lang="en-US" sz="1900" dirty="0">
                 <a:solidFill>
                   <a:srgbClr val="14142B"/>
                 </a:solidFill>
@@ -13471,7 +13518,7 @@
               <a:t>· </a:t>
             </a:r>
             <a:r>
-              <a:rPr lang="ko-KR" altLang="en-US" sz="2000" dirty="0">
+              <a:rPr lang="ko-KR" altLang="en-US" sz="1900" dirty="0">
                 <a:solidFill>
                   <a:srgbClr val="14142B"/>
                 </a:solidFill>
@@ -13481,7 +13528,7 @@
               </a:rPr>
               <a:t>월요일부터</a:t>
             </a:r>
-            <a:endParaRPr lang="en-US" sz="2000" dirty="0"/>
+            <a:endParaRPr lang="en-US" sz="1900" dirty="0"/>
           </a:p>
           <a:p>
             <a:pPr marL="228600" indent="-228600" eaLnBrk="1">
@@ -13492,7 +13539,7 @@
               <a:buChar char="•"/>
             </a:pPr>
             <a:r>
-              <a:rPr lang="ko-KR" altLang="en-US" sz="2000" dirty="0">
+              <a:rPr lang="ko-KR" altLang="en-US" sz="1900" dirty="0">
                 <a:solidFill>
                   <a:srgbClr val="14142B"/>
                 </a:solidFill>
@@ -13500,10 +13547,10 @@
                 <a:ea typeface="Malgun Gothic" pitchFamily="34" charset="-122"/>
                 <a:cs typeface="Malgun Gothic" pitchFamily="34" charset="-120"/>
               </a:rPr>
-              <a:t>아홉 시부터 </a:t>
-            </a:r>
-            <a:r>
-              <a:rPr lang="en-US" sz="2000" dirty="0">
+              <a:t>아홉 시부터 </a:t>
+            </a:r>
+            <a:r>
+              <a:rPr lang="en-US" sz="1900" dirty="0">
                 <a:solidFill>
                   <a:srgbClr val="14142B"/>
                 </a:solidFill>
@@ -13511,7 +13558,7 @@
               <a:t>(no </a:t>
             </a:r>
             <a:r>
-              <a:rPr lang="ko-KR" altLang="en-US" sz="2000" dirty="0">
+              <a:rPr lang="ko-KR" altLang="en-US" sz="1900" dirty="0">
                 <a:solidFill>
                   <a:srgbClr val="14142B"/>
                 </a:solidFill>
@@ -13519,23 +13566,23 @@
                 <a:ea typeface="Malgun Gothic" pitchFamily="34" charset="-122"/>
                 <a:cs typeface="Malgun Gothic" pitchFamily="34" charset="-120"/>
               </a:rPr>
-              <a:t>아홉 시에부터</a:t>
-            </a:r>
-            <a:r>
-              <a:rPr lang="en-US" sz="2000" dirty="0">
+              <a:t>아홉 시에부터</a:t>
+            </a:r>
+            <a:r>
+              <a:rPr lang="en-US" sz="1900" dirty="0">
                 <a:solidFill>
                   <a:srgbClr val="14142B"/>
                 </a:solidFill>
               </a:rPr>
               <a:t>*)</a:t>
             </a:r>
-            <a:endParaRPr lang="en-US" sz="2000" dirty="0"/>
+            <a:endParaRPr lang="en-US" sz="1900" dirty="0"/>
           </a:p>
         </p:txBody>
       </p:sp>
       <p:sp>
         <p:nvSpPr>
-          <p:cNvPr id="8" name="col_1"/>
+          <p:cNvPr id="9" name="col_1"/>
           <p:cNvSpPr/>
           <p:nvPr/>
         </p:nvSpPr>
@@ -13562,7 +13609,7 @@
       </p:sp>
       <p:sp>
         <p:nvSpPr>
-          <p:cNvPr id="9" name="Text 7"/>
+          <p:cNvPr id="10" name="Text 7"/>
           <p:cNvSpPr txBox="1"/>
           <p:nvPr/>
         </p:nvSpPr>
@@ -13598,15 +13645,39 @@
           </a:p>
         </p:txBody>
       </p:sp>
-      <p:sp>
-        <p:nvSpPr>
-          <p:cNvPr id="10" name="Text 8"/>
+      <p:pic>
+        <p:nvPicPr>
+          <p:cNvPr id="11" name="col_img_1" descr="C:\Users\Chingu\AppData\Local\Temp\claude\C--Users-Chingu-Desktop-ACADEMIASEULWEB\d4111e1b-5523-44ea-97b2-b1a1d9545b9e\scratchpad\decks\cache\img_a890aabbc14af2c4.png"/>
+          <p:cNvPicPr>
+            <a:picLocks noChangeAspect="1"/>
+          </p:cNvPicPr>
+          <p:nvPr/>
+        </p:nvPicPr>
+        <p:blipFill>
+          <a:blip r:embed="rId4"/>
+          <a:stretch>
+            <a:fillRect/>
+          </a:stretch>
+        </p:blipFill>
+        <p:spPr>
+          <a:xfrm>
+            <a:off x="8193024" y="2651760"/>
+            <a:ext cx="1508760" cy="685800"/>
+          </a:xfrm>
+          <a:prstGeom prst="rect">
+            <a:avLst/>
+          </a:prstGeom>
+        </p:spPr>
+      </p:pic>
+      <p:sp>
+        <p:nvSpPr>
+          <p:cNvPr id="12" name="Text 8"/>
           <p:cNvSpPr txBox="1"/>
           <p:nvPr/>
         </p:nvSpPr>
         <p:spPr>
           <a:xfrm>
-            <a:off x="6483096" y="2651760"/>
+            <a:off x="6483096" y="3429000"/>
             <a:ext cx="4928616" cy="914400"/>
           </a:xfrm>
           <a:prstGeom prst="rect">
@@ -13660,14 +13731,14 @@
       </p:sp>
       <p:sp>
         <p:nvSpPr>
-          <p:cNvPr id="11" name="lista"/>
+          <p:cNvPr id="13" name="lista"/>
           <p:cNvSpPr txBox="1"/>
           <p:nvPr/>
         </p:nvSpPr>
         <p:spPr>
           <a:xfrm>
-            <a:off x="6437376" y="3657600"/>
-            <a:ext cx="5020056" cy="2377440"/>
+            <a:off x="6437376" y="4434840"/>
+            <a:ext cx="5020056" cy="1600200"/>
           </a:xfrm>
           <a:prstGeom prst="rect">
             <a:avLst/>
@@ -13689,7 +13760,7 @@
               <a:buChar char="•"/>
             </a:pPr>
             <a:r>
-              <a:rPr lang="ko-KR" altLang="en-US" sz="2000" dirty="0">
+              <a:rPr lang="ko-KR" altLang="en-US" sz="1700" dirty="0">
                 <a:solidFill>
                   <a:srgbClr val="14142B"/>
                 </a:solidFill>
@@ -13699,7 +13770,7 @@
               </a:rPr>
               <a:t>서울에서 부산까지</a:t>
             </a:r>
-            <a:endParaRPr lang="en-US" sz="2000" dirty="0"/>
+            <a:endParaRPr lang="en-US" sz="1700" dirty="0"/>
           </a:p>
           <a:p>
             <a:pPr marL="228600" indent="-228600" eaLnBrk="1">
@@ -13710,7 +13781,7 @@
               <a:buChar char="•"/>
             </a:pPr>
             <a:r>
-              <a:rPr lang="ko-KR" altLang="en-US" sz="2000" dirty="0">
+              <a:rPr lang="ko-KR" altLang="en-US" sz="1700" dirty="0">
                 <a:solidFill>
                   <a:srgbClr val="14142B"/>
                 </a:solidFill>
@@ -13721,14 +13792,14 @@
               <a:t>에서 </a:t>
             </a:r>
             <a:r>
-              <a:rPr lang="en-US" sz="2000" dirty="0">
+              <a:rPr lang="en-US" sz="1700" dirty="0">
                 <a:solidFill>
                   <a:srgbClr val="14142B"/>
                 </a:solidFill>
               </a:rPr>
               <a:t>= desde (lugar), el mismo de la semana 3</a:t>
             </a:r>
-            <a:endParaRPr lang="en-US" sz="2000" dirty="0"/>
+            <a:endParaRPr lang="en-US" sz="1700" dirty="0"/>
           </a:p>
           <a:p>
             <a:pPr marL="228600" indent="-228600" eaLnBrk="1">
@@ -13739,7 +13810,7 @@
               <a:buChar char="•"/>
             </a:pPr>
             <a:r>
-              <a:rPr lang="ko-KR" altLang="en-US" sz="2000" dirty="0">
+              <a:rPr lang="ko-KR" altLang="en-US" sz="1700" dirty="0">
                 <a:solidFill>
                   <a:srgbClr val="14142B"/>
                 </a:solidFill>
@@ -13750,7 +13821,7 @@
               <a:t>까지 </a:t>
             </a:r>
             <a:r>
-              <a:rPr lang="en-US" sz="2000" dirty="0">
+              <a:rPr lang="en-US" sz="1700" dirty="0">
                 <a:solidFill>
                   <a:srgbClr val="14142B"/>
                 </a:solidFill>
@@ -13758,7 +13829,7 @@
               <a:t>≠ </a:t>
             </a:r>
             <a:r>
-              <a:rPr lang="ko-KR" altLang="en-US" sz="2000" dirty="0">
+              <a:rPr lang="ko-KR" altLang="en-US" sz="1700" dirty="0">
                 <a:solidFill>
                   <a:srgbClr val="14142B"/>
                 </a:solidFill>
@@ -13769,7 +13840,7 @@
               <a:t>가지 </a:t>
             </a:r>
             <a:r>
-              <a:rPr lang="en-US" sz="2000" dirty="0">
+              <a:rPr lang="en-US" sz="1700" dirty="0">
                 <a:solidFill>
                   <a:srgbClr val="14142B"/>
                 </a:solidFill>
@@ -13777,7 +13848,7 @@
               <a:t>(berenjena): </a:t>
             </a:r>
             <a:r>
-              <a:rPr lang="ko-KR" altLang="en-US" sz="2000" dirty="0">
+              <a:rPr lang="ko-KR" altLang="en-US" sz="1700" dirty="0">
                 <a:solidFill>
                   <a:srgbClr val="14142B"/>
                 </a:solidFill>
@@ -13788,14 +13859,14 @@
               <a:t>ㄲ </a:t>
             </a:r>
             <a:r>
-              <a:rPr lang="en-US" sz="2000" dirty="0">
+              <a:rPr lang="en-US" sz="1700" dirty="0">
                 <a:solidFill>
                   <a:srgbClr val="14142B"/>
                 </a:solidFill>
               </a:rPr>
               <a:t>apretada, sin aire</a:t>
             </a:r>
-            <a:endParaRPr lang="en-US" sz="2000" dirty="0"/>
+            <a:endParaRPr lang="en-US" sz="1700" dirty="0"/>
           </a:p>
         </p:txBody>
       </p:sp>
@@ -14051,8 +14122,8 @@
         </p:nvSpPr>
         <p:spPr>
           <a:xfrm>
-            <a:off x="1463040" y="3657600"/>
-            <a:ext cx="9262872" cy="822960"/>
+            <a:off x="1783080" y="3657600"/>
+            <a:ext cx="8439912" cy="822960"/>
           </a:xfrm>
           <a:prstGeom prst="rect">
             <a:avLst/>
@@ -14294,7 +14365,7 @@
         <p:spPr>
           <a:xfrm>
             <a:off x="548640" y="1325880"/>
-            <a:ext cx="11064240" cy="457200"/>
+            <a:ext cx="11091672" cy="457200"/>
           </a:xfrm>
           <a:prstGeom prst="rect">
             <a:avLst/>
@@ -14699,15 +14770,39 @@
           </a:p>
         </p:txBody>
       </p:sp>
-      <p:sp>
-        <p:nvSpPr>
-          <p:cNvPr id="9" name="Text 7"/>
+      <p:pic>
+        <p:nvPicPr>
+          <p:cNvPr id="9" name="col_img_1" descr="C:\Users\Chingu\AppData\Local\Temp\claude\C--Users-Chingu-Desktop-ACADEMIASEULWEB\d4111e1b-5523-44ea-97b2-b1a1d9545b9e\scratchpad\decks\cache\img_86a9c21ae62eda64.png"/>
+          <p:cNvPicPr>
+            <a:picLocks noChangeAspect="1"/>
+          </p:cNvPicPr>
+          <p:nvPr/>
+        </p:nvPicPr>
+        <p:blipFill>
+          <a:blip r:embed="rId3"/>
+          <a:stretch>
+            <a:fillRect/>
+          </a:stretch>
+        </p:blipFill>
+        <p:spPr>
+          <a:xfrm>
+            <a:off x="8193024" y="2651760"/>
+            <a:ext cx="1508760" cy="685800"/>
+          </a:xfrm>
+          <a:prstGeom prst="rect">
+            <a:avLst/>
+          </a:prstGeom>
+        </p:spPr>
+      </p:pic>
+      <p:sp>
+        <p:nvSpPr>
+          <p:cNvPr id="10" name="Text 7"/>
           <p:cNvSpPr txBox="1"/>
           <p:nvPr/>
         </p:nvSpPr>
         <p:spPr>
           <a:xfrm>
-            <a:off x="6483096" y="2651760"/>
+            <a:off x="6483096" y="3429000"/>
             <a:ext cx="4928616" cy="914400"/>
           </a:xfrm>
           <a:prstGeom prst="rect">
@@ -14742,14 +14837,14 @@
       </p:sp>
       <p:sp>
         <p:nvSpPr>
-          <p:cNvPr id="10" name="lista"/>
+          <p:cNvPr id="11" name="lista"/>
           <p:cNvSpPr txBox="1"/>
           <p:nvPr/>
         </p:nvSpPr>
         <p:spPr>
           <a:xfrm>
-            <a:off x="6437376" y="3657600"/>
-            <a:ext cx="5020056" cy="2377440"/>
+            <a:off x="6437376" y="4434840"/>
+            <a:ext cx="5020056" cy="1600200"/>
           </a:xfrm>
           <a:prstGeom prst="rect">
             <a:avLst/>
@@ -14771,7 +14866,7 @@
               <a:buChar char="•"/>
             </a:pPr>
             <a:r>
-              <a:rPr lang="ko-KR" altLang="en-US" sz="2000" dirty="0">
+              <a:rPr lang="ko-KR" altLang="en-US" sz="1200" dirty="0">
                 <a:solidFill>
                   <a:srgbClr val="14142B"/>
                 </a:solidFill>
@@ -14782,7 +14877,7 @@
               <a:t>화요일 </a:t>
             </a:r>
             <a:r>
-              <a:rPr lang="en-US" sz="2000" dirty="0">
+              <a:rPr lang="en-US" sz="1200" dirty="0">
                 <a:solidFill>
                   <a:srgbClr val="14142B"/>
                 </a:solidFill>
@@ -14790,7 +14885,7 @@
               <a:t>~ </a:t>
             </a:r>
             <a:r>
-              <a:rPr lang="ko-KR" altLang="en-US" sz="2000" dirty="0">
+              <a:rPr lang="ko-KR" altLang="en-US" sz="1200" dirty="0">
                 <a:solidFill>
                   <a:srgbClr val="14142B"/>
                 </a:solidFill>
@@ -14801,7 +14896,7 @@
               <a:t>일요일 </a:t>
             </a:r>
             <a:r>
-              <a:rPr lang="en-US" sz="2000" dirty="0">
+              <a:rPr lang="en-US" sz="1200" dirty="0">
                 <a:solidFill>
                   <a:srgbClr val="14142B"/>
                 </a:solidFill>
@@ -14809,7 +14904,7 @@
               <a:t>· </a:t>
             </a:r>
             <a:r>
-              <a:rPr lang="ko-KR" altLang="en-US" sz="2000" dirty="0">
+              <a:rPr lang="ko-KR" altLang="en-US" sz="1200" dirty="0">
                 <a:solidFill>
                   <a:srgbClr val="14142B"/>
                 </a:solidFill>
@@ -14820,7 +14915,7 @@
               <a:t>오전 </a:t>
             </a:r>
             <a:r>
-              <a:rPr lang="en-US" sz="2000" dirty="0">
+              <a:rPr lang="en-US" sz="1200" dirty="0">
                 <a:solidFill>
                   <a:srgbClr val="14142B"/>
                 </a:solidFill>
@@ -14828,7 +14923,7 @@
               <a:t>8:00 ~ </a:t>
             </a:r>
             <a:r>
-              <a:rPr lang="ko-KR" altLang="en-US" sz="2000" dirty="0">
+              <a:rPr lang="ko-KR" altLang="en-US" sz="1200" dirty="0">
                 <a:solidFill>
                   <a:srgbClr val="14142B"/>
                 </a:solidFill>
@@ -14839,14 +14934,14 @@
               <a:t>오후 </a:t>
             </a:r>
             <a:r>
-              <a:rPr lang="en-US" sz="2000" dirty="0">
+              <a:rPr lang="en-US" sz="1200" dirty="0">
                 <a:solidFill>
                   <a:srgbClr val="14142B"/>
                 </a:solidFill>
               </a:rPr>
               <a:t>10:00</a:t>
             </a:r>
-            <a:endParaRPr lang="en-US" sz="2000" dirty="0"/>
+            <a:endParaRPr lang="en-US" sz="1200" dirty="0"/>
           </a:p>
           <a:p>
             <a:pPr marL="228600" indent="-228600" eaLnBrk="1">
@@ -14857,7 +14952,7 @@
               <a:buChar char="•"/>
             </a:pPr>
             <a:r>
-              <a:rPr lang="ko-KR" altLang="en-US" sz="2000" dirty="0">
+              <a:rPr lang="ko-KR" altLang="en-US" sz="1200" dirty="0">
                 <a:solidFill>
                   <a:srgbClr val="14142B"/>
                 </a:solidFill>
@@ -14868,14 +14963,14 @@
               <a:t>월요일은 쉽니다</a:t>
             </a:r>
             <a:r>
-              <a:rPr lang="en-US" sz="2000" dirty="0">
+              <a:rPr lang="en-US" sz="1200" dirty="0">
                 <a:solidFill>
                   <a:srgbClr val="14142B"/>
                 </a:solidFill>
               </a:rPr>
               <a:t>.</a:t>
             </a:r>
-            <a:endParaRPr lang="en-US" sz="2000" dirty="0"/>
+            <a:endParaRPr lang="en-US" sz="1200" dirty="0"/>
           </a:p>
           <a:p>
             <a:pPr marL="228600" indent="-228600" eaLnBrk="1">
@@ -14886,7 +14981,7 @@
               <a:buChar char="•"/>
             </a:pPr>
             <a:r>
-              <a:rPr lang="ko-KR" altLang="en-US" sz="2000" dirty="0">
+              <a:rPr lang="ko-KR" altLang="en-US" sz="1200" dirty="0">
                 <a:solidFill>
                   <a:srgbClr val="14142B"/>
                 </a:solidFill>
@@ -14897,14 +14992,14 @@
               <a:t>① 카페는 매일 쉬어요</a:t>
             </a:r>
             <a:r>
-              <a:rPr lang="en-US" sz="2000" dirty="0">
+              <a:rPr lang="en-US" sz="1200" dirty="0">
                 <a:solidFill>
                   <a:srgbClr val="14142B"/>
                 </a:solidFill>
               </a:rPr>
               <a:t>.</a:t>
             </a:r>
-            <a:endParaRPr lang="en-US" sz="2000" dirty="0"/>
+            <a:endParaRPr lang="en-US" sz="1200" dirty="0"/>
           </a:p>
           <a:p>
             <a:pPr marL="228600" indent="-228600" eaLnBrk="1">
@@ -14915,7 +15010,7 @@
               <a:buChar char="•"/>
             </a:pPr>
             <a:r>
-              <a:rPr lang="ko-KR" altLang="en-US" sz="2000" dirty="0">
+              <a:rPr lang="ko-KR" altLang="en-US" sz="1200" dirty="0">
                 <a:solidFill>
                   <a:srgbClr val="14142B"/>
                 </a:solidFill>
@@ -14926,14 +15021,14 @@
               <a:t>② 카페는 월요일에 쉬어요</a:t>
             </a:r>
             <a:r>
-              <a:rPr lang="en-US" sz="2000" dirty="0">
+              <a:rPr lang="en-US" sz="1200" dirty="0">
                 <a:solidFill>
                   <a:srgbClr val="14142B"/>
                 </a:solidFill>
               </a:rPr>
               <a:t>.</a:t>
             </a:r>
-            <a:endParaRPr lang="en-US" sz="2000" dirty="0"/>
+            <a:endParaRPr lang="en-US" sz="1200" dirty="0"/>
           </a:p>
           <a:p>
             <a:pPr marL="228600" indent="-228600" eaLnBrk="1">
@@ -14944,7 +15039,7 @@
               <a:buChar char="•"/>
             </a:pPr>
             <a:r>
-              <a:rPr lang="ko-KR" altLang="en-US" sz="2000" dirty="0">
+              <a:rPr lang="ko-KR" altLang="en-US" sz="1200" dirty="0">
                 <a:solidFill>
                   <a:srgbClr val="14142B"/>
                 </a:solidFill>
@@ -14955,14 +15050,14 @@
               <a:t>③ 여기는 식당이에요</a:t>
             </a:r>
             <a:r>
-              <a:rPr lang="en-US" sz="2000" dirty="0">
+              <a:rPr lang="en-US" sz="1200" dirty="0">
                 <a:solidFill>
                   <a:srgbClr val="14142B"/>
                 </a:solidFill>
               </a:rPr>
               <a:t>.</a:t>
             </a:r>
-            <a:endParaRPr lang="en-US" sz="2000" dirty="0"/>
+            <a:endParaRPr lang="en-US" sz="1200" dirty="0"/>
           </a:p>
           <a:p>
             <a:pPr marL="228600" indent="-228600" eaLnBrk="1">
@@ -14973,7 +15068,7 @@
               <a:buChar char="•"/>
             </a:pPr>
             <a:r>
-              <a:rPr lang="ko-KR" altLang="en-US" sz="2000" dirty="0">
+              <a:rPr lang="ko-KR" altLang="en-US" sz="1200" dirty="0">
                 <a:solidFill>
                   <a:srgbClr val="14142B"/>
                 </a:solidFill>
@@ -14984,14 +15079,14 @@
               <a:t>④ 카페는 토요일에 쉬어요</a:t>
             </a:r>
             <a:r>
-              <a:rPr lang="en-US" sz="2000" dirty="0">
+              <a:rPr lang="en-US" sz="1200" dirty="0">
                 <a:solidFill>
                   <a:srgbClr val="14142B"/>
                 </a:solidFill>
               </a:rPr>
               <a:t>.</a:t>
             </a:r>
-            <a:endParaRPr lang="en-US" sz="2000" dirty="0"/>
+            <a:endParaRPr lang="en-US" sz="1200" dirty="0"/>
           </a:p>
         </p:txBody>
       </p:sp>
@@ -15166,7 +15261,7 @@
         <p:spPr>
           <a:xfrm>
             <a:off x="548640" y="1325880"/>
-            <a:ext cx="11064240" cy="457200"/>
+            <a:ext cx="11091672" cy="457200"/>
           </a:xfrm>
           <a:prstGeom prst="rect">
             <a:avLst/>
@@ -15226,7 +15321,7 @@
           <p:nvPr>
             <p:extLst>
               <p:ext uri="{D42A27DB-BD31-4B8C-83A1-F6EECF244321}">
-                <p14:modId xmlns:p14="http://schemas.microsoft.com/office/powerpoint/2010/main" val="4288621817"/>
+                <p14:modId xmlns:p14="http://schemas.microsoft.com/office/powerpoint/2010/main" val="2584242079"/>
               </p:ext>
             </p:extLst>
           </p:nvPr>
@@ -16925,7 +17020,7 @@
         <p:spPr>
           <a:xfrm>
             <a:off x="548640" y="1325880"/>
-            <a:ext cx="11064240" cy="548640"/>
+            <a:ext cx="11091672" cy="548640"/>
           </a:xfrm>
           <a:prstGeom prst="rect">
             <a:avLst/>
@@ -18130,69 +18225,20 @@
               <a:buNone/>
             </a:pPr>
             <a:r>
-              <a:rPr lang="ko-KR" altLang="en-US" sz="2200" b="1" dirty="0">
-                <a:solidFill>
-                  <a:srgbClr val="4236F6"/>
-                </a:solidFill>
-                <a:latin typeface="Malgun Gothic" pitchFamily="34" charset="0"/>
-                <a:ea typeface="Malgun Gothic" pitchFamily="34" charset="-122"/>
-                <a:cs typeface="Malgun Gothic" pitchFamily="34" charset="-120"/>
-              </a:rPr>
-              <a:t>주말 잘 보냈어요</a:t>
-            </a:r>
-            <a:r>
               <a:rPr lang="en-US" sz="2200" b="1" dirty="0">
                 <a:solidFill>
-                  <a:srgbClr val="4236F6"/>
-                </a:solidFill>
-              </a:rPr>
-              <a:t>? — </a:t>
-            </a:r>
-            <a:r>
-              <a:rPr lang="ko-KR" altLang="en-US" sz="2200" b="1" dirty="0">
-                <a:solidFill>
-                  <a:srgbClr val="4236F6"/>
-                </a:solidFill>
-                <a:latin typeface="Malgun Gothic" pitchFamily="34" charset="0"/>
-                <a:ea typeface="Malgun Gothic" pitchFamily="34" charset="-122"/>
-                <a:cs typeface="Malgun Gothic" pitchFamily="34" charset="-120"/>
-              </a:rPr>
-              <a:t>네</a:t>
-            </a:r>
-            <a:r>
-              <a:rPr lang="en-US" sz="2200" b="1" dirty="0">
-                <a:solidFill>
-                  <a:srgbClr val="4236F6"/>
-                </a:solidFill>
-              </a:rPr>
-              <a:t>, </a:t>
-            </a:r>
-            <a:r>
-              <a:rPr lang="ko-KR" altLang="en-US" sz="2200" b="1" dirty="0">
-                <a:solidFill>
-                  <a:srgbClr val="4236F6"/>
-                </a:solidFill>
-                <a:latin typeface="Malgun Gothic" pitchFamily="34" charset="0"/>
-                <a:ea typeface="Malgun Gothic" pitchFamily="34" charset="-122"/>
-                <a:cs typeface="Malgun Gothic" pitchFamily="34" charset="-120"/>
-              </a:rPr>
-              <a:t>친구하고 카페에 갔어요</a:t>
-            </a:r>
-            <a:r>
-              <a:rPr lang="en-US" sz="2200" b="1" dirty="0">
-                <a:solidFill>
-                  <a:srgbClr val="4236F6"/>
-                </a:solidFill>
-              </a:rPr>
-              <a:t>.  </a:t>
-            </a:r>
-            <a:r>
-              <a:rPr lang="en-US" sz="2200" b="1" dirty="0">
-                <a:solidFill>
                   <a:srgbClr val="003478"/>
                 </a:solidFill>
               </a:rPr>
               <a:t>¿Qué tal el finde? Fui a un café</a:t>
+            </a:r>
+            <a:r>
+              <a:rPr lang="en-US" sz="1500" b="1" i="1" dirty="0">
+                <a:solidFill>
+                  <a:srgbClr val="8A8DA0"/>
+                </a:solidFill>
+              </a:rPr>
+              <a:t>   How was your weekend? I went to a café</a:t>
             </a:r>
             <a:endParaRPr lang="en-US" sz="3000" dirty="0"/>
           </a:p>
@@ -18207,7 +18253,7 @@
         <p:spPr>
           <a:xfrm>
             <a:off x="548640" y="1325880"/>
-            <a:ext cx="6949440" cy="548640"/>
+            <a:ext cx="5669280" cy="548640"/>
           </a:xfrm>
           <a:prstGeom prst="rect">
             <a:avLst/>
@@ -18245,7 +18291,7 @@
         <p:spPr>
           <a:xfrm>
             <a:off x="548640" y="1965960"/>
-            <a:ext cx="6949440" cy="4206240"/>
+            <a:ext cx="5669280" cy="4206240"/>
           </a:xfrm>
           <a:prstGeom prst="rect">
             <a:avLst/>
@@ -18418,12 +18464,12 @@
         </p:nvSpPr>
         <p:spPr>
           <a:xfrm>
-            <a:off x="8001000" y="1417320"/>
-            <a:ext cx="3611880" cy="4480560"/>
+            <a:off x="6446520" y="1371600"/>
+            <a:ext cx="5193792" cy="4800600"/>
           </a:xfrm>
           <a:prstGeom prst="roundRect">
             <a:avLst>
-              <a:gd name="adj" fmla="val 6329"/>
+              <a:gd name="adj" fmla="val 4762"/>
             </a:avLst>
           </a:prstGeom>
           <a:solidFill>
@@ -18437,16 +18483,40 @@
           </a:ln>
         </p:spPr>
       </p:sp>
-      <p:sp>
-        <p:nvSpPr>
-          <p:cNvPr id="6" name="ko_grande"/>
+      <p:pic>
+        <p:nvPicPr>
+          <p:cNvPr id="6" name="imagen" descr="C:\Users\Chingu\AppData\Local\Temp\claude\C--Users-Chingu-Desktop-ACADEMIASEULWEB\d4111e1b-5523-44ea-97b2-b1a1d9545b9e\scratchpad\decks\cache\img_63ce8c9bebe0e183.png"/>
+          <p:cNvPicPr>
+            <a:picLocks noChangeAspect="1"/>
+          </p:cNvPicPr>
+          <p:nvPr/>
+        </p:nvPicPr>
+        <p:blipFill>
+          <a:blip r:embed="rId3"/>
+          <a:stretch>
+            <a:fillRect/>
+          </a:stretch>
+        </p:blipFill>
+        <p:spPr>
+          <a:xfrm>
+            <a:off x="7437384" y="1463040"/>
+            <a:ext cx="3212063" cy="3703320"/>
+          </a:xfrm>
+          <a:prstGeom prst="rect">
+            <a:avLst/>
+          </a:prstGeom>
+        </p:spPr>
+      </p:pic>
+      <p:sp>
+        <p:nvSpPr>
+          <p:cNvPr id="7" name="ko_grande"/>
           <p:cNvSpPr txBox="1"/>
           <p:nvPr/>
         </p:nvSpPr>
         <p:spPr>
           <a:xfrm>
-            <a:off x="8092440" y="1874520"/>
-            <a:ext cx="3429000" cy="2926080"/>
+            <a:off x="6583680" y="5257800"/>
+            <a:ext cx="4919472" cy="777240"/>
           </a:xfrm>
           <a:prstGeom prst="rect">
             <a:avLst/>
@@ -18464,7 +18534,7 @@
               <a:buNone/>
             </a:pPr>
             <a:r>
-              <a:rPr lang="ko-KR" altLang="en-US" sz="2800" b="1" dirty="0">
+              <a:rPr lang="ko-KR" altLang="en-US" sz="2400" b="1" dirty="0">
                 <a:solidFill>
                   <a:srgbClr val="4236F6"/>
                 </a:solidFill>
@@ -18475,7 +18545,7 @@
               <a:t>주말 잘 보냈어요</a:t>
             </a:r>
             <a:r>
-              <a:rPr lang="en-US" sz="2800" b="1" dirty="0">
+              <a:rPr lang="en-US" sz="2400" b="1" dirty="0">
                 <a:solidFill>
                   <a:srgbClr val="4236F6"/>
                 </a:solidFill>
@@ -18483,7 +18553,7 @@
               <a:t>? — </a:t>
             </a:r>
             <a:r>
-              <a:rPr lang="ko-KR" altLang="en-US" sz="2800" b="1" dirty="0">
+              <a:rPr lang="ko-KR" altLang="en-US" sz="2400" b="1" dirty="0">
                 <a:solidFill>
                   <a:srgbClr val="4236F6"/>
                 </a:solidFill>
@@ -18494,15 +18564,21 @@
               <a:t>네</a:t>
             </a:r>
             <a:r>
-              <a:rPr lang="en-US" sz="2800" b="1" dirty="0">
+              <a:rPr lang="en-US" sz="2400" b="1" dirty="0">
                 <a:solidFill>
                   <a:srgbClr val="4236F6"/>
                 </a:solidFill>
               </a:rPr>
-              <a:t>, </a:t>
-            </a:r>
-            <a:r>
-              <a:rPr lang="ko-KR" altLang="en-US" sz="2800" b="1" dirty="0">
+              <a:t>,</a:t>
+            </a:r>
+            <a:endParaRPr lang="en-US" sz="2400" dirty="0"/>
+          </a:p>
+          <a:p>
+            <a:pPr marL="0" indent="0" algn="ctr" eaLnBrk="1">
+              <a:buNone/>
+            </a:pPr>
+            <a:r>
+              <a:rPr lang="ko-KR" altLang="en-US" sz="2400" b="1" dirty="0">
                 <a:solidFill>
                   <a:srgbClr val="4236F6"/>
                 </a:solidFill>
@@ -18513,14 +18589,14 @@
               <a:t>친구하고 카페에 갔어요</a:t>
             </a:r>
             <a:r>
-              <a:rPr lang="en-US" sz="2800" b="1" dirty="0">
+              <a:rPr lang="en-US" sz="2400" b="1" dirty="0">
                 <a:solidFill>
                   <a:srgbClr val="4236F6"/>
                 </a:solidFill>
               </a:rPr>
               <a:t>.</a:t>
             </a:r>
-            <a:endParaRPr lang="en-US" sz="2800" dirty="0"/>
+            <a:endParaRPr lang="en-US" sz="2400" dirty="0"/>
           </a:p>
         </p:txBody>
       </p:sp>
@@ -19539,7 +19615,7 @@
         <p:spPr>
           <a:xfrm>
             <a:off x="548640" y="1325880"/>
-            <a:ext cx="11064240" cy="548640"/>
+            <a:ext cx="11091672" cy="548640"/>
           </a:xfrm>
           <a:prstGeom prst="rect">
             <a:avLst/>
@@ -19576,7 +19652,7 @@
         </p:nvSpPr>
         <p:spPr>
           <a:xfrm>
-            <a:off x="548640" y="2171700"/>
+            <a:off x="548640" y="2574950"/>
             <a:ext cx="457200" cy="457200"/>
           </a:xfrm>
           <a:prstGeom prst="ellipse">
@@ -19601,7 +19677,7 @@
         </p:nvSpPr>
         <p:spPr>
           <a:xfrm>
-            <a:off x="548640" y="2171700"/>
+            <a:off x="548640" y="2574950"/>
             <a:ext cx="457200" cy="457200"/>
           </a:xfrm>
           <a:prstGeom prst="rect">
@@ -19639,7 +19715,7 @@
         </p:nvSpPr>
         <p:spPr>
           <a:xfrm>
-            <a:off x="1188720" y="1965960"/>
+            <a:off x="1188720" y="2369210"/>
             <a:ext cx="6080760" cy="868680"/>
           </a:xfrm>
           <a:prstGeom prst="rect">
@@ -19688,7 +19764,7 @@
         </p:nvSpPr>
         <p:spPr>
           <a:xfrm>
-            <a:off x="7498080" y="2002536"/>
+            <a:off x="7498080" y="2405786"/>
             <a:ext cx="4142232" cy="795528"/>
           </a:xfrm>
           <a:prstGeom prst="roundRect">
@@ -19715,7 +19791,7 @@
         </p:nvSpPr>
         <p:spPr>
           <a:xfrm>
-            <a:off x="7589520" y="2002536"/>
+            <a:off x="7589520" y="2405786"/>
             <a:ext cx="3959352" cy="795528"/>
           </a:xfrm>
           <a:prstGeom prst="rect">
@@ -19821,7 +19897,7 @@
         </p:nvSpPr>
         <p:spPr>
           <a:xfrm>
-            <a:off x="548640" y="3168396"/>
+            <a:off x="548640" y="3571646"/>
             <a:ext cx="457200" cy="457200"/>
           </a:xfrm>
           <a:prstGeom prst="ellipse">
@@ -19846,7 +19922,7 @@
         </p:nvSpPr>
         <p:spPr>
           <a:xfrm>
-            <a:off x="548640" y="3168396"/>
+            <a:off x="548640" y="3571646"/>
             <a:ext cx="457200" cy="457200"/>
           </a:xfrm>
           <a:prstGeom prst="rect">
@@ -19884,7 +19960,7 @@
         </p:nvSpPr>
         <p:spPr>
           <a:xfrm>
-            <a:off x="1188720" y="2962656"/>
+            <a:off x="1188720" y="3365906"/>
             <a:ext cx="6080760" cy="868680"/>
           </a:xfrm>
           <a:prstGeom prst="rect">
@@ -19971,7 +20047,7 @@
         </p:nvSpPr>
         <p:spPr>
           <a:xfrm>
-            <a:off x="7498080" y="2999232"/>
+            <a:off x="7498080" y="3402482"/>
             <a:ext cx="4142232" cy="795528"/>
           </a:xfrm>
           <a:prstGeom prst="roundRect">
@@ -19998,7 +20074,7 @@
         </p:nvSpPr>
         <p:spPr>
           <a:xfrm>
-            <a:off x="7589520" y="2999232"/>
+            <a:off x="7589520" y="3402482"/>
             <a:ext cx="3959352" cy="795528"/>
           </a:xfrm>
           <a:prstGeom prst="rect">
@@ -20058,7 +20134,7 @@
         </p:nvSpPr>
         <p:spPr>
           <a:xfrm>
-            <a:off x="548640" y="4165092"/>
+            <a:off x="548640" y="4568342"/>
             <a:ext cx="457200" cy="457200"/>
           </a:xfrm>
           <a:prstGeom prst="ellipse">
@@ -20083,7 +20159,7 @@
         </p:nvSpPr>
         <p:spPr>
           <a:xfrm>
-            <a:off x="548640" y="4165092"/>
+            <a:off x="548640" y="4568342"/>
             <a:ext cx="457200" cy="457200"/>
           </a:xfrm>
           <a:prstGeom prst="rect">
@@ -20121,7 +20197,7 @@
         </p:nvSpPr>
         <p:spPr>
           <a:xfrm>
-            <a:off x="1188720" y="3959352"/>
+            <a:off x="1188720" y="4362602"/>
             <a:ext cx="6080760" cy="868680"/>
           </a:xfrm>
           <a:prstGeom prst="rect">
@@ -20170,7 +20246,7 @@
         </p:nvSpPr>
         <p:spPr>
           <a:xfrm>
-            <a:off x="7498080" y="3995928"/>
+            <a:off x="7498080" y="4399178"/>
             <a:ext cx="4142232" cy="795528"/>
           </a:xfrm>
           <a:prstGeom prst="roundRect">
@@ -20197,7 +20273,7 @@
         </p:nvSpPr>
         <p:spPr>
           <a:xfrm>
-            <a:off x="7589520" y="3995928"/>
+            <a:off x="7589520" y="4399178"/>
             <a:ext cx="3959352" cy="795528"/>
           </a:xfrm>
           <a:prstGeom prst="rect">
@@ -20698,7 +20774,7 @@
               <a:buChar char="•"/>
             </a:pPr>
             <a:r>
-              <a:rPr lang="ko-KR" altLang="en-US" sz="2400" dirty="0">
+              <a:rPr lang="ko-KR" altLang="en-US" sz="2800" dirty="0">
                 <a:solidFill>
                   <a:srgbClr val="14142B"/>
                 </a:solidFill>
@@ -20709,14 +20785,14 @@
               <a:t>주말에 뭐 했어요</a:t>
             </a:r>
             <a:r>
-              <a:rPr lang="en-US" sz="2400" dirty="0">
+              <a:rPr lang="en-US" sz="2800" dirty="0">
                 <a:solidFill>
                   <a:srgbClr val="14142B"/>
                 </a:solidFill>
               </a:rPr>
               <a:t>? — ¿Qué hiciste el fin de semana?</a:t>
             </a:r>
-            <a:endParaRPr lang="en-US" sz="2400" dirty="0"/>
+            <a:endParaRPr lang="en-US" sz="2800" dirty="0"/>
           </a:p>
           <a:p>
             <a:pPr marL="228600" indent="-228600" eaLnBrk="1">
@@ -20727,7 +20803,7 @@
               <a:buChar char="•"/>
             </a:pPr>
             <a:r>
-              <a:rPr lang="ko-KR" altLang="en-US" sz="2400" dirty="0">
+              <a:rPr lang="ko-KR" altLang="en-US" sz="2800" dirty="0">
                 <a:solidFill>
                   <a:srgbClr val="14142B"/>
                 </a:solidFill>
@@ -20738,14 +20814,14 @@
               <a:t>친구하고 영화를 봤어요</a:t>
             </a:r>
             <a:r>
-              <a:rPr lang="en-US" sz="2400" dirty="0">
+              <a:rPr lang="en-US" sz="2800" dirty="0">
                 <a:solidFill>
                   <a:srgbClr val="14142B"/>
                 </a:solidFill>
               </a:rPr>
               <a:t>. — Vi una película con un amigo.</a:t>
             </a:r>
-            <a:endParaRPr lang="en-US" sz="2400" dirty="0"/>
+            <a:endParaRPr lang="en-US" sz="2800" dirty="0"/>
           </a:p>
           <a:p>
             <a:pPr marL="228600" indent="-228600" eaLnBrk="1">
@@ -20756,7 +20832,7 @@
               <a:buChar char="•"/>
             </a:pPr>
             <a:r>
-              <a:rPr lang="ko-KR" altLang="en-US" sz="2400" dirty="0">
+              <a:rPr lang="ko-KR" altLang="en-US" sz="2800" dirty="0">
                 <a:solidFill>
                   <a:srgbClr val="14142B"/>
                 </a:solidFill>
@@ -20764,17 +20840,17 @@
                 <a:ea typeface="Malgun Gothic" pitchFamily="34" charset="-122"/>
                 <a:cs typeface="Malgun Gothic" pitchFamily="34" charset="-120"/>
               </a:rPr>
-              <a:t>아홉 시부터 여섯 시까지 일했어요</a:t>
-            </a:r>
-            <a:r>
-              <a:rPr lang="en-US" sz="2400" dirty="0">
+              <a:t>아홉 시부터 여섯 시까지 일했어요</a:t>
+            </a:r>
+            <a:r>
+              <a:rPr lang="en-US" sz="2800" dirty="0">
                 <a:solidFill>
                   <a:srgbClr val="14142B"/>
                 </a:solidFill>
               </a:rPr>
               <a:t>. — Trabajé de nueve a seis.</a:t>
             </a:r>
-            <a:endParaRPr lang="en-US" sz="2400" dirty="0"/>
+            <a:endParaRPr lang="en-US" sz="2800" dirty="0"/>
           </a:p>
         </p:txBody>
       </p:sp>
@@ -21788,7 +21864,7 @@
         <p:spPr>
           <a:xfrm>
             <a:off x="548640" y="1325880"/>
-            <a:ext cx="11064240" cy="548640"/>
+            <a:ext cx="11091672" cy="548640"/>
           </a:xfrm>
           <a:prstGeom prst="rect">
             <a:avLst/>
@@ -22566,7 +22642,7 @@
               <a:buNone/>
             </a:pPr>
             <a:r>
-              <a:rPr lang="ko-KR" altLang="en-US" sz="2400" dirty="0">
+              <a:rPr lang="ko-KR" altLang="en-US" sz="2300" dirty="0">
                 <a:solidFill>
                   <a:srgbClr val="14142B"/>
                 </a:solidFill>
@@ -22577,7 +22653,7 @@
               <a:t>¿Cuál es formal? ① 가요 </a:t>
             </a:r>
             <a:r>
-              <a:rPr lang="en-US" sz="2400" dirty="0">
+              <a:rPr lang="en-US" sz="2300" dirty="0">
                 <a:solidFill>
                   <a:srgbClr val="14142B"/>
                 </a:solidFill>
@@ -22585,7 +22661,7 @@
               <a:t>② </a:t>
             </a:r>
             <a:r>
-              <a:rPr lang="ko-KR" altLang="en-US" sz="2400" dirty="0">
+              <a:rPr lang="ko-KR" altLang="en-US" sz="2300" dirty="0">
                 <a:solidFill>
                   <a:srgbClr val="14142B"/>
                 </a:solidFill>
@@ -22595,7 +22671,7 @@
               </a:rPr>
               <a:t>갑니다</a:t>
             </a:r>
-            <a:endParaRPr lang="en-US" sz="2400" dirty="0"/>
+            <a:endParaRPr lang="en-US" sz="2300" dirty="0"/>
           </a:p>
         </p:txBody>
       </p:sp>
@@ -22757,7 +22833,7 @@
               <a:buNone/>
             </a:pPr>
             <a:r>
-              <a:rPr lang="ko-KR" altLang="en-US" sz="2400" dirty="0">
+              <a:rPr lang="ko-KR" altLang="en-US" sz="2300" dirty="0">
                 <a:solidFill>
                   <a:srgbClr val="14142B"/>
                 </a:solidFill>
@@ -22768,14 +22844,14 @@
               <a:t>카페 한강</a:t>
             </a:r>
             <a:r>
-              <a:rPr lang="en-US" sz="2400" dirty="0">
+              <a:rPr lang="en-US" sz="2300" dirty="0">
                 <a:solidFill>
                   <a:srgbClr val="14142B"/>
                 </a:solidFill>
               </a:rPr>
               <a:t>: ¿qué frase es correcta?</a:t>
             </a:r>
-            <a:endParaRPr lang="en-US" sz="2400" dirty="0"/>
+            <a:endParaRPr lang="en-US" sz="2300" dirty="0"/>
           </a:p>
         </p:txBody>
       </p:sp>
@@ -23854,7 +23930,7 @@
         <p:spPr>
           <a:xfrm>
             <a:off x="548640" y="1325880"/>
-            <a:ext cx="11064240" cy="548640"/>
+            <a:ext cx="11091672" cy="548640"/>
           </a:xfrm>
           <a:prstGeom prst="rect">
             <a:avLst/>
@@ -23891,7 +23967,7 @@
         </p:nvSpPr>
         <p:spPr>
           <a:xfrm>
-            <a:off x="548640" y="2171700"/>
+            <a:off x="548640" y="2574950"/>
             <a:ext cx="457200" cy="457200"/>
           </a:xfrm>
           <a:prstGeom prst="ellipse">
@@ -23916,7 +23992,7 @@
         </p:nvSpPr>
         <p:spPr>
           <a:xfrm>
-            <a:off x="548640" y="2171700"/>
+            <a:off x="548640" y="2574950"/>
             <a:ext cx="457200" cy="457200"/>
           </a:xfrm>
           <a:prstGeom prst="rect">
@@ -23954,7 +24030,7 @@
         </p:nvSpPr>
         <p:spPr>
           <a:xfrm>
-            <a:off x="1188720" y="1965960"/>
+            <a:off x="1188720" y="2369210"/>
             <a:ext cx="5285232" cy="868680"/>
           </a:xfrm>
           <a:prstGeom prst="rect">
@@ -24003,7 +24079,7 @@
         </p:nvSpPr>
         <p:spPr>
           <a:xfrm>
-            <a:off x="6702552" y="2002536"/>
+            <a:off x="6702552" y="2405786"/>
             <a:ext cx="4937760" cy="795528"/>
           </a:xfrm>
           <a:prstGeom prst="roundRect">
@@ -24030,7 +24106,7 @@
         </p:nvSpPr>
         <p:spPr>
           <a:xfrm>
-            <a:off x="6793992" y="2002536"/>
+            <a:off x="6793992" y="2405786"/>
             <a:ext cx="4754880" cy="795528"/>
           </a:xfrm>
           <a:prstGeom prst="rect">
@@ -24098,7 +24174,7 @@
         </p:nvSpPr>
         <p:spPr>
           <a:xfrm>
-            <a:off x="548640" y="3168396"/>
+            <a:off x="548640" y="3571646"/>
             <a:ext cx="457200" cy="457200"/>
           </a:xfrm>
           <a:prstGeom prst="ellipse">
@@ -24123,7 +24199,7 @@
         </p:nvSpPr>
         <p:spPr>
           <a:xfrm>
-            <a:off x="548640" y="3168396"/>
+            <a:off x="548640" y="3571646"/>
             <a:ext cx="457200" cy="457200"/>
           </a:xfrm>
           <a:prstGeom prst="rect">
@@ -24161,7 +24237,7 @@
         </p:nvSpPr>
         <p:spPr>
           <a:xfrm>
-            <a:off x="1188720" y="2962656"/>
+            <a:off x="1188720" y="3365906"/>
             <a:ext cx="5285232" cy="868680"/>
           </a:xfrm>
           <a:prstGeom prst="rect">
@@ -24210,7 +24286,7 @@
         </p:nvSpPr>
         <p:spPr>
           <a:xfrm>
-            <a:off x="6702552" y="2999232"/>
+            <a:off x="6702552" y="3402482"/>
             <a:ext cx="4937760" cy="795528"/>
           </a:xfrm>
           <a:prstGeom prst="roundRect">
@@ -24237,7 +24313,7 @@
         </p:nvSpPr>
         <p:spPr>
           <a:xfrm>
-            <a:off x="6793992" y="2999232"/>
+            <a:off x="6793992" y="3402482"/>
             <a:ext cx="4754880" cy="795528"/>
           </a:xfrm>
           <a:prstGeom prst="rect">
@@ -24305,7 +24381,7 @@
         </p:nvSpPr>
         <p:spPr>
           <a:xfrm>
-            <a:off x="548640" y="4165092"/>
+            <a:off x="548640" y="4568342"/>
             <a:ext cx="457200" cy="457200"/>
           </a:xfrm>
           <a:prstGeom prst="ellipse">
@@ -24330,7 +24406,7 @@
         </p:nvSpPr>
         <p:spPr>
           <a:xfrm>
-            <a:off x="548640" y="4165092"/>
+            <a:off x="548640" y="4568342"/>
             <a:ext cx="457200" cy="457200"/>
           </a:xfrm>
           <a:prstGeom prst="rect">
@@ -24368,7 +24444,7 @@
         </p:nvSpPr>
         <p:spPr>
           <a:xfrm>
-            <a:off x="1188720" y="3959352"/>
+            <a:off x="1188720" y="4362602"/>
             <a:ext cx="5285232" cy="868680"/>
           </a:xfrm>
           <a:prstGeom prst="rect">
@@ -24428,7 +24504,7 @@
         </p:nvSpPr>
         <p:spPr>
           <a:xfrm>
-            <a:off x="6702552" y="3995928"/>
+            <a:off x="6702552" y="4399178"/>
             <a:ext cx="4937760" cy="795528"/>
           </a:xfrm>
           <a:prstGeom prst="roundRect">
@@ -24455,7 +24531,7 @@
         </p:nvSpPr>
         <p:spPr>
           <a:xfrm>
-            <a:off x="6793992" y="3995928"/>
+            <a:off x="6793992" y="4399178"/>
             <a:ext cx="4754880" cy="795528"/>
           </a:xfrm>
           <a:prstGeom prst="rect">
@@ -25083,7 +25159,7 @@
           <p:nvPr>
             <p:extLst>
               <p:ext uri="{D42A27DB-BD31-4B8C-83A1-F6EECF244321}">
-                <p14:modId xmlns:p14="http://schemas.microsoft.com/office/powerpoint/2010/main" val="241982140"/>
+                <p14:modId xmlns:p14="http://schemas.microsoft.com/office/powerpoint/2010/main" val="3743874273"/>
               </p:ext>
             </p:extLst>
           </p:nvPr>
@@ -25577,7 +25653,7 @@
                           <a:ea typeface="Malgun Gothic" pitchFamily="34" charset="-122"/>
                           <a:cs typeface="Malgun Gothic" pitchFamily="34" charset="-120"/>
                         </a:rPr>
-                        <a:t>아홉 시부터 여섯 시까지 일했어요</a:t>
+                        <a:t>아홉 시부터 여섯 시까지 일했어요</a:t>
                       </a:r>
                       <a:r>
                         <a:rPr lang="en-US" sz="1600" dirty="0">
@@ -26181,7 +26257,7 @@
         <p:spPr>
           <a:xfrm>
             <a:off x="548640" y="1325880"/>
-            <a:ext cx="11064240" cy="548640"/>
+            <a:ext cx="11091672" cy="548640"/>
           </a:xfrm>
           <a:prstGeom prst="rect">
             <a:avLst/>
@@ -26212,14 +26288,72 @@
       </p:sp>
       <p:sp>
         <p:nvSpPr>
-          <p:cNvPr id="4" name="num_0"/>
+          <p:cNvPr id="4" name="card_0"/>
           <p:cNvSpPr/>
           <p:nvPr/>
         </p:nvSpPr>
         <p:spPr>
           <a:xfrm>
-            <a:off x="548640" y="2171700"/>
-            <a:ext cx="457200" cy="457200"/>
+            <a:off x="548640" y="1965960"/>
+            <a:ext cx="3575304" cy="4206240"/>
+          </a:xfrm>
+          <a:prstGeom prst="roundRect">
+            <a:avLst>
+              <a:gd name="adj" fmla="val 3836"/>
+            </a:avLst>
+          </a:prstGeom>
+          <a:solidFill>
+            <a:srgbClr val="FFFFFF"/>
+          </a:solidFill>
+          <a:ln w="12700">
+            <a:solidFill>
+              <a:srgbClr val="D9D7F7"/>
+            </a:solidFill>
+            <a:prstDash val="solid"/>
+          </a:ln>
+          <a:effectLst>
+            <a:outerShdw blurRad="76200" dist="25400" dir="5400000" algn="bl" rotWithShape="0">
+              <a:srgbClr val="14142B">
+                <a:alpha val="12000"/>
+              </a:srgbClr>
+            </a:outerShdw>
+          </a:effectLst>
+        </p:spPr>
+      </p:sp>
+      <p:pic>
+        <p:nvPicPr>
+          <p:cNvPr id="5" name="item_img_0" descr="C:\Users\Chingu\AppData\Local\Temp\claude\C--Users-Chingu-Desktop-ACADEMIASEULWEB\d4111e1b-5523-44ea-97b2-b1a1d9545b9e\scratchpad\decks\cache\img_3ed592e326f7dce0.png"/>
+          <p:cNvPicPr>
+            <a:picLocks noChangeAspect="1"/>
+          </p:cNvPicPr>
+          <p:nvPr/>
+        </p:nvPicPr>
+        <p:blipFill>
+          <a:blip r:embed="rId3"/>
+          <a:stretch>
+            <a:fillRect/>
+          </a:stretch>
+        </p:blipFill>
+        <p:spPr>
+          <a:xfrm>
+            <a:off x="1421892" y="2057400"/>
+            <a:ext cx="1828800" cy="1828800"/>
+          </a:xfrm>
+          <a:prstGeom prst="rect">
+            <a:avLst/>
+          </a:prstGeom>
+        </p:spPr>
+      </p:pic>
+      <p:sp>
+        <p:nvSpPr>
+          <p:cNvPr id="6" name="num_0"/>
+          <p:cNvSpPr/>
+          <p:nvPr/>
+        </p:nvSpPr>
+        <p:spPr>
+          <a:xfrm>
+            <a:off x="640080" y="2057400"/>
+            <a:ext cx="420624" cy="420624"/>
           </a:xfrm>
           <a:prstGeom prst="ellipse">
             <a:avLst/>
@@ -26227,9 +26361,9 @@
           <a:solidFill>
             <a:srgbClr val="003478"/>
           </a:solidFill>
-          <a:ln w="12700">
+          <a:ln w="19050">
             <a:solidFill>
-              <a:srgbClr val="003478"/>
+              <a:srgbClr val="FFFFFF"/>
             </a:solidFill>
             <a:prstDash val="solid"/>
           </a:ln>
@@ -26237,14 +26371,14 @@
       </p:sp>
       <p:sp>
         <p:nvSpPr>
-          <p:cNvPr id="5" name="Text 3"/>
+          <p:cNvPr id="7" name="Text 4"/>
           <p:cNvSpPr txBox="1"/>
           <p:nvPr/>
         </p:nvSpPr>
         <p:spPr>
           <a:xfrm>
-            <a:off x="548640" y="2171700"/>
-            <a:ext cx="457200" cy="457200"/>
+            <a:off x="640080" y="2057400"/>
+            <a:ext cx="420624" cy="420624"/>
           </a:xfrm>
           <a:prstGeom prst="rect">
             <a:avLst/>
@@ -26262,27 +26396,27 @@
               <a:buNone/>
             </a:pPr>
             <a:r>
-              <a:rPr lang="en-US" sz="1600" b="1" dirty="0">
+              <a:rPr lang="en-US" sz="1500" b="1" dirty="0">
                 <a:solidFill>
                   <a:srgbClr val="FFFFFF"/>
                 </a:solidFill>
               </a:rPr>
               <a:t>1</a:t>
             </a:r>
-            <a:endParaRPr lang="en-US" sz="1600" dirty="0"/>
+            <a:endParaRPr lang="en-US" sz="1500" dirty="0"/>
           </a:p>
         </p:txBody>
       </p:sp>
       <p:sp>
         <p:nvSpPr>
-          <p:cNvPr id="6" name="Text 4"/>
+          <p:cNvPr id="8" name="Text 5"/>
           <p:cNvSpPr txBox="1"/>
           <p:nvPr/>
         </p:nvSpPr>
         <p:spPr>
           <a:xfrm>
-            <a:off x="1188720" y="1965960"/>
-            <a:ext cx="4462272" cy="868680"/>
+            <a:off x="640080" y="3931920"/>
+            <a:ext cx="3392424" cy="1234440"/>
           </a:xfrm>
           <a:prstGeom prst="rect">
             <a:avLst/>
@@ -26296,35 +26430,35 @@
           </a:bodyPr>
           <a:lstStyle/>
           <a:p>
-            <a:pPr marL="0" indent="0" eaLnBrk="1">
+            <a:pPr marL="0" indent="0" algn="ctr" eaLnBrk="1">
               <a:buNone/>
             </a:pPr>
             <a:r>
-              <a:rPr lang="en-US" sz="2400" dirty="0">
+              <a:rPr lang="en-US" sz="2200" dirty="0">
                 <a:solidFill>
                   <a:srgbClr val="14142B"/>
                 </a:solidFill>
               </a:rPr>
               <a:t>Foto 1 · parque</a:t>
             </a:r>
-            <a:endParaRPr lang="en-US" sz="2400" dirty="0"/>
+            <a:endParaRPr lang="en-US" sz="2200" dirty="0"/>
           </a:p>
         </p:txBody>
       </p:sp>
       <p:sp>
         <p:nvSpPr>
-          <p:cNvPr id="7" name="rev_8_caja"/>
+          <p:cNvPr id="9" name="rev_8_caja"/>
           <p:cNvSpPr/>
           <p:nvPr/>
         </p:nvSpPr>
         <p:spPr>
           <a:xfrm>
-            <a:off x="5879592" y="2002536"/>
-            <a:ext cx="5760720" cy="795528"/>
+            <a:off x="658368" y="5212080"/>
+            <a:ext cx="3355848" cy="868680"/>
           </a:xfrm>
           <a:prstGeom prst="roundRect">
             <a:avLst>
-              <a:gd name="adj" fmla="val 13793"/>
+              <a:gd name="adj" fmla="val 12632"/>
             </a:avLst>
           </a:prstGeom>
           <a:solidFill>
@@ -26340,14 +26474,14 @@
       </p:sp>
       <p:sp>
         <p:nvSpPr>
-          <p:cNvPr id="8" name="rev_8_txt"/>
+          <p:cNvPr id="10" name="rev_8_txt"/>
           <p:cNvSpPr txBox="1"/>
           <p:nvPr/>
         </p:nvSpPr>
         <p:spPr>
           <a:xfrm>
-            <a:off x="5971032" y="2002536"/>
-            <a:ext cx="5577840" cy="795528"/>
+            <a:off x="685800" y="5212080"/>
+            <a:ext cx="3300984" cy="868680"/>
           </a:xfrm>
           <a:prstGeom prst="rect">
             <a:avLst/>
@@ -26365,7 +26499,7 @@
               <a:buNone/>
             </a:pPr>
             <a:r>
-              <a:rPr lang="ko-KR" altLang="en-US" sz="2200" b="1" dirty="0">
+              <a:rPr lang="ko-KR" altLang="en-US" sz="1700" b="1" dirty="0">
                 <a:solidFill>
                   <a:srgbClr val="FFFFFF"/>
                 </a:solidFill>
@@ -26376,27 +26510,85 @@
               <a:t>토요일 아침에 공원에서 운동했어요</a:t>
             </a:r>
             <a:r>
-              <a:rPr lang="en-US" sz="2200" b="1" dirty="0">
+              <a:rPr lang="en-US" sz="1700" b="1" dirty="0">
                 <a:solidFill>
                   <a:srgbClr val="FFFFFF"/>
                 </a:solidFill>
               </a:rPr>
               <a:t>.</a:t>
             </a:r>
-            <a:endParaRPr lang="en-US" sz="2200" dirty="0"/>
+            <a:endParaRPr lang="en-US" sz="1700" dirty="0"/>
           </a:p>
         </p:txBody>
       </p:sp>
       <p:sp>
         <p:nvSpPr>
-          <p:cNvPr id="9" name="num_1"/>
+          <p:cNvPr id="11" name="card_1"/>
           <p:cNvSpPr/>
           <p:nvPr/>
         </p:nvSpPr>
         <p:spPr>
           <a:xfrm>
-            <a:off x="548640" y="3168396"/>
-            <a:ext cx="457200" cy="457200"/>
+            <a:off x="4306824" y="1965960"/>
+            <a:ext cx="3575304" cy="4206240"/>
+          </a:xfrm>
+          <a:prstGeom prst="roundRect">
+            <a:avLst>
+              <a:gd name="adj" fmla="val 3836"/>
+            </a:avLst>
+          </a:prstGeom>
+          <a:solidFill>
+            <a:srgbClr val="FFFFFF"/>
+          </a:solidFill>
+          <a:ln w="12700">
+            <a:solidFill>
+              <a:srgbClr val="D9D7F7"/>
+            </a:solidFill>
+            <a:prstDash val="solid"/>
+          </a:ln>
+          <a:effectLst>
+            <a:outerShdw blurRad="76200" dist="25400" dir="5400000" algn="bl" rotWithShape="0">
+              <a:srgbClr val="14142B">
+                <a:alpha val="12000"/>
+              </a:srgbClr>
+            </a:outerShdw>
+          </a:effectLst>
+        </p:spPr>
+      </p:sp>
+      <p:pic>
+        <p:nvPicPr>
+          <p:cNvPr id="12" name="item_img_1" descr="C:\Users\Chingu\AppData\Local\Temp\claude\C--Users-Chingu-Desktop-ACADEMIASEULWEB\d4111e1b-5523-44ea-97b2-b1a1d9545b9e\scratchpad\decks\cache\img_828d0bd2313f8860.png"/>
+          <p:cNvPicPr>
+            <a:picLocks noChangeAspect="1"/>
+          </p:cNvPicPr>
+          <p:nvPr/>
+        </p:nvPicPr>
+        <p:blipFill>
+          <a:blip r:embed="rId4"/>
+          <a:stretch>
+            <a:fillRect/>
+          </a:stretch>
+        </p:blipFill>
+        <p:spPr>
+          <a:xfrm>
+            <a:off x="5180076" y="2057400"/>
+            <a:ext cx="1828800" cy="1828800"/>
+          </a:xfrm>
+          <a:prstGeom prst="rect">
+            <a:avLst/>
+          </a:prstGeom>
+        </p:spPr>
+      </p:pic>
+      <p:sp>
+        <p:nvSpPr>
+          <p:cNvPr id="13" name="num_1"/>
+          <p:cNvSpPr/>
+          <p:nvPr/>
+        </p:nvSpPr>
+        <p:spPr>
+          <a:xfrm>
+            <a:off x="4398264" y="2057400"/>
+            <a:ext cx="420624" cy="420624"/>
           </a:xfrm>
           <a:prstGeom prst="ellipse">
             <a:avLst/>
@@ -26404,9 +26596,9 @@
           <a:solidFill>
             <a:srgbClr val="003478"/>
           </a:solidFill>
-          <a:ln w="12700">
+          <a:ln w="19050">
             <a:solidFill>
-              <a:srgbClr val="003478"/>
+              <a:srgbClr val="FFFFFF"/>
             </a:solidFill>
             <a:prstDash val="solid"/>
           </a:ln>
@@ -26414,14 +26606,14 @@
       </p:sp>
       <p:sp>
         <p:nvSpPr>
-          <p:cNvPr id="10" name="Text 8"/>
+          <p:cNvPr id="14" name="Text 10"/>
           <p:cNvSpPr txBox="1"/>
           <p:nvPr/>
         </p:nvSpPr>
         <p:spPr>
           <a:xfrm>
-            <a:off x="548640" y="3168396"/>
-            <a:ext cx="457200" cy="457200"/>
+            <a:off x="4398264" y="2057400"/>
+            <a:ext cx="420624" cy="420624"/>
           </a:xfrm>
           <a:prstGeom prst="rect">
             <a:avLst/>
@@ -26439,27 +26631,27 @@
               <a:buNone/>
             </a:pPr>
             <a:r>
-              <a:rPr lang="en-US" sz="1600" b="1" dirty="0">
+              <a:rPr lang="en-US" sz="1500" b="1" dirty="0">
                 <a:solidFill>
                   <a:srgbClr val="FFFFFF"/>
                 </a:solidFill>
               </a:rPr>
               <a:t>2</a:t>
             </a:r>
-            <a:endParaRPr lang="en-US" sz="1600" dirty="0"/>
+            <a:endParaRPr lang="en-US" sz="1500" dirty="0"/>
           </a:p>
         </p:txBody>
       </p:sp>
       <p:sp>
         <p:nvSpPr>
-          <p:cNvPr id="11" name="Text 9"/>
+          <p:cNvPr id="15" name="Text 11"/>
           <p:cNvSpPr txBox="1"/>
           <p:nvPr/>
         </p:nvSpPr>
         <p:spPr>
           <a:xfrm>
-            <a:off x="1188720" y="2962656"/>
-            <a:ext cx="4462272" cy="868680"/>
+            <a:off x="4398264" y="3931920"/>
+            <a:ext cx="3392424" cy="1234440"/>
           </a:xfrm>
           <a:prstGeom prst="rect">
             <a:avLst/>
@@ -26473,35 +26665,35 @@
           </a:bodyPr>
           <a:lstStyle/>
           <a:p>
-            <a:pPr marL="0" indent="0" eaLnBrk="1">
+            <a:pPr marL="0" indent="0" algn="ctr" eaLnBrk="1">
               <a:buNone/>
             </a:pPr>
             <a:r>
-              <a:rPr lang="en-US" sz="2400" dirty="0">
+              <a:rPr lang="en-US" sz="2200" dirty="0">
                 <a:solidFill>
                   <a:srgbClr val="14142B"/>
                 </a:solidFill>
               </a:rPr>
               <a:t>Foto 2 · café</a:t>
             </a:r>
-            <a:endParaRPr lang="en-US" sz="2400" dirty="0"/>
+            <a:endParaRPr lang="en-US" sz="2200" dirty="0"/>
           </a:p>
         </p:txBody>
       </p:sp>
       <p:sp>
         <p:nvSpPr>
-          <p:cNvPr id="12" name="rev_9_caja"/>
+          <p:cNvPr id="16" name="rev_9_caja"/>
           <p:cNvSpPr/>
           <p:nvPr/>
         </p:nvSpPr>
         <p:spPr>
           <a:xfrm>
-            <a:off x="5879592" y="2999232"/>
-            <a:ext cx="5760720" cy="795528"/>
+            <a:off x="4416552" y="5212080"/>
+            <a:ext cx="3355848" cy="868680"/>
           </a:xfrm>
           <a:prstGeom prst="roundRect">
             <a:avLst>
-              <a:gd name="adj" fmla="val 13793"/>
+              <a:gd name="adj" fmla="val 12632"/>
             </a:avLst>
           </a:prstGeom>
           <a:solidFill>
@@ -26517,14 +26709,14 @@
       </p:sp>
       <p:sp>
         <p:nvSpPr>
-          <p:cNvPr id="13" name="rev_9_txt"/>
+          <p:cNvPr id="17" name="rev_9_txt"/>
           <p:cNvSpPr txBox="1"/>
           <p:nvPr/>
         </p:nvSpPr>
         <p:spPr>
           <a:xfrm>
-            <a:off x="5971032" y="2999232"/>
-            <a:ext cx="5577840" cy="795528"/>
+            <a:off x="4443984" y="5212080"/>
+            <a:ext cx="3300984" cy="868680"/>
           </a:xfrm>
           <a:prstGeom prst="rect">
             <a:avLst/>
@@ -26542,7 +26734,7 @@
               <a:buNone/>
             </a:pPr>
             <a:r>
-              <a:rPr lang="ko-KR" altLang="en-US" sz="2200" b="1" dirty="0">
+              <a:rPr lang="ko-KR" altLang="en-US" sz="1700" b="1" dirty="0">
                 <a:solidFill>
                   <a:srgbClr val="FFFFFF"/>
                 </a:solidFill>
@@ -26550,10 +26742,10 @@
                 <a:ea typeface="Malgun Gothic" pitchFamily="34" charset="-122"/>
                 <a:cs typeface="Malgun Gothic" pitchFamily="34" charset="-120"/>
               </a:rPr>
-              <a:t>열한 시부터 한 시까지 카페에 있었어요</a:t>
-            </a:r>
-            <a:r>
-              <a:rPr lang="en-US" sz="2200" b="1" dirty="0">
+              <a:t>열한 시부터 한 시까지 카페에 있었어요</a:t>
+            </a:r>
+            <a:r>
+              <a:rPr lang="en-US" sz="1700" b="1" dirty="0">
                 <a:solidFill>
                   <a:srgbClr val="FFFFFF"/>
                 </a:solidFill>
@@ -26561,7 +26753,7 @@
               <a:t>. </a:t>
             </a:r>
             <a:r>
-              <a:rPr lang="ko-KR" altLang="en-US" sz="2200" b="1" dirty="0">
+              <a:rPr lang="ko-KR" altLang="en-US" sz="1700" b="1" dirty="0">
                 <a:solidFill>
                   <a:srgbClr val="FFFFFF"/>
                 </a:solidFill>
@@ -26572,27 +26764,85 @@
               <a:t>커피를 마셨어요</a:t>
             </a:r>
             <a:r>
-              <a:rPr lang="en-US" sz="2200" b="1" dirty="0">
+              <a:rPr lang="en-US" sz="1700" b="1" dirty="0">
                 <a:solidFill>
                   <a:srgbClr val="FFFFFF"/>
                 </a:solidFill>
               </a:rPr>
               <a:t>.</a:t>
             </a:r>
-            <a:endParaRPr lang="en-US" sz="2200" dirty="0"/>
+            <a:endParaRPr lang="en-US" sz="1700" dirty="0"/>
           </a:p>
         </p:txBody>
       </p:sp>
       <p:sp>
         <p:nvSpPr>
-          <p:cNvPr id="14" name="num_2"/>
+          <p:cNvPr id="18" name="card_2"/>
           <p:cNvSpPr/>
           <p:nvPr/>
         </p:nvSpPr>
         <p:spPr>
           <a:xfrm>
-            <a:off x="548640" y="4165092"/>
-            <a:ext cx="457200" cy="457200"/>
+            <a:off x="8065008" y="1965960"/>
+            <a:ext cx="3575304" cy="4206240"/>
+          </a:xfrm>
+          <a:prstGeom prst="roundRect">
+            <a:avLst>
+              <a:gd name="adj" fmla="val 3836"/>
+            </a:avLst>
+          </a:prstGeom>
+          <a:solidFill>
+            <a:srgbClr val="FFFFFF"/>
+          </a:solidFill>
+          <a:ln w="12700">
+            <a:solidFill>
+              <a:srgbClr val="D9D7F7"/>
+            </a:solidFill>
+            <a:prstDash val="solid"/>
+          </a:ln>
+          <a:effectLst>
+            <a:outerShdw blurRad="76200" dist="25400" dir="5400000" algn="bl" rotWithShape="0">
+              <a:srgbClr val="14142B">
+                <a:alpha val="12000"/>
+              </a:srgbClr>
+            </a:outerShdw>
+          </a:effectLst>
+        </p:spPr>
+      </p:sp>
+      <p:pic>
+        <p:nvPicPr>
+          <p:cNvPr id="19" name="item_img_2" descr="C:\Users\Chingu\AppData\Local\Temp\claude\C--Users-Chingu-Desktop-ACADEMIASEULWEB\d4111e1b-5523-44ea-97b2-b1a1d9545b9e\scratchpad\decks\cache\img_f8803db8c5127889.png"/>
+          <p:cNvPicPr>
+            <a:picLocks noChangeAspect="1"/>
+          </p:cNvPicPr>
+          <p:nvPr/>
+        </p:nvPicPr>
+        <p:blipFill>
+          <a:blip r:embed="rId5"/>
+          <a:stretch>
+            <a:fillRect/>
+          </a:stretch>
+        </p:blipFill>
+        <p:spPr>
+          <a:xfrm>
+            <a:off x="8938260" y="2057400"/>
+            <a:ext cx="1828800" cy="1828800"/>
+          </a:xfrm>
+          <a:prstGeom prst="rect">
+            <a:avLst/>
+          </a:prstGeom>
+        </p:spPr>
+      </p:pic>
+      <p:sp>
+        <p:nvSpPr>
+          <p:cNvPr id="20" name="num_2"/>
+          <p:cNvSpPr/>
+          <p:nvPr/>
+        </p:nvSpPr>
+        <p:spPr>
+          <a:xfrm>
+            <a:off x="8156448" y="2057400"/>
+            <a:ext cx="420624" cy="420624"/>
           </a:xfrm>
           <a:prstGeom prst="ellipse">
             <a:avLst/>
@@ -26600,9 +26850,9 @@
           <a:solidFill>
             <a:srgbClr val="003478"/>
           </a:solidFill>
-          <a:ln w="12700">
+          <a:ln w="19050">
             <a:solidFill>
-              <a:srgbClr val="003478"/>
+              <a:srgbClr val="FFFFFF"/>
             </a:solidFill>
             <a:prstDash val="solid"/>
           </a:ln>
@@ -26610,14 +26860,14 @@
       </p:sp>
       <p:sp>
         <p:nvSpPr>
-          <p:cNvPr id="15" name="Text 13"/>
+          <p:cNvPr id="21" name="Text 16"/>
           <p:cNvSpPr txBox="1"/>
           <p:nvPr/>
         </p:nvSpPr>
         <p:spPr>
           <a:xfrm>
-            <a:off x="548640" y="4165092"/>
-            <a:ext cx="457200" cy="457200"/>
+            <a:off x="8156448" y="2057400"/>
+            <a:ext cx="420624" cy="420624"/>
           </a:xfrm>
           <a:prstGeom prst="rect">
             <a:avLst/>
@@ -26635,27 +26885,27 @@
               <a:buNone/>
             </a:pPr>
             <a:r>
-              <a:rPr lang="en-US" sz="1600" b="1" dirty="0">
+              <a:rPr lang="en-US" sz="1500" b="1" dirty="0">
                 <a:solidFill>
                   <a:srgbClr val="FFFFFF"/>
                 </a:solidFill>
               </a:rPr>
               <a:t>3</a:t>
             </a:r>
-            <a:endParaRPr lang="en-US" sz="1600" dirty="0"/>
+            <a:endParaRPr lang="en-US" sz="1500" dirty="0"/>
           </a:p>
         </p:txBody>
       </p:sp>
       <p:sp>
         <p:nvSpPr>
-          <p:cNvPr id="16" name="Text 14"/>
+          <p:cNvPr id="22" name="Text 17"/>
           <p:cNvSpPr txBox="1"/>
           <p:nvPr/>
         </p:nvSpPr>
         <p:spPr>
           <a:xfrm>
-            <a:off x="1188720" y="3959352"/>
-            <a:ext cx="4462272" cy="868680"/>
+            <a:off x="8156448" y="3931920"/>
+            <a:ext cx="3392424" cy="1234440"/>
           </a:xfrm>
           <a:prstGeom prst="rect">
             <a:avLst/>
@@ -26669,35 +26919,35 @@
           </a:bodyPr>
           <a:lstStyle/>
           <a:p>
-            <a:pPr marL="0" indent="0" eaLnBrk="1">
+            <a:pPr marL="0" indent="0" algn="ctr" eaLnBrk="1">
               <a:buNone/>
             </a:pPr>
             <a:r>
-              <a:rPr lang="en-US" sz="2400" dirty="0">
+              <a:rPr lang="en-US" sz="2200" dirty="0">
                 <a:solidFill>
                   <a:srgbClr val="14142B"/>
                 </a:solidFill>
               </a:rPr>
               <a:t>Foto 3 · amigo + comida</a:t>
             </a:r>
-            <a:endParaRPr lang="en-US" sz="2400" dirty="0"/>
+            <a:endParaRPr lang="en-US" sz="2200" dirty="0"/>
           </a:p>
         </p:txBody>
       </p:sp>
       <p:sp>
         <p:nvSpPr>
-          <p:cNvPr id="17" name="rev_10_caja"/>
+          <p:cNvPr id="23" name="rev_10_caja"/>
           <p:cNvSpPr/>
           <p:nvPr/>
         </p:nvSpPr>
         <p:spPr>
           <a:xfrm>
-            <a:off x="5879592" y="3995928"/>
-            <a:ext cx="5760720" cy="795528"/>
+            <a:off x="8174736" y="5212080"/>
+            <a:ext cx="3355848" cy="868680"/>
           </a:xfrm>
           <a:prstGeom prst="roundRect">
             <a:avLst>
-              <a:gd name="adj" fmla="val 13793"/>
+              <a:gd name="adj" fmla="val 12632"/>
             </a:avLst>
           </a:prstGeom>
           <a:solidFill>
@@ -26713,14 +26963,14 @@
       </p:sp>
       <p:sp>
         <p:nvSpPr>
-          <p:cNvPr id="18" name="rev_10_txt"/>
+          <p:cNvPr id="24" name="rev_10_txt"/>
           <p:cNvSpPr txBox="1"/>
           <p:nvPr/>
         </p:nvSpPr>
         <p:spPr>
           <a:xfrm>
-            <a:off x="5971032" y="3995928"/>
-            <a:ext cx="5577840" cy="795528"/>
+            <a:off x="8202168" y="5212080"/>
+            <a:ext cx="3300984" cy="868680"/>
           </a:xfrm>
           <a:prstGeom prst="rect">
             <a:avLst/>
@@ -26738,7 +26988,7 @@
               <a:buNone/>
             </a:pPr>
             <a:r>
-              <a:rPr lang="ko-KR" altLang="en-US" sz="2200" b="1" dirty="0">
+              <a:rPr lang="ko-KR" altLang="en-US" sz="1700" b="1" dirty="0">
                 <a:solidFill>
                   <a:srgbClr val="FFFFFF"/>
                 </a:solidFill>
@@ -26749,7 +26999,7 @@
               <a:t>친구하고 점심을 먹었어요</a:t>
             </a:r>
             <a:r>
-              <a:rPr lang="en-US" sz="2200" b="1" dirty="0">
+              <a:rPr lang="en-US" sz="1700" b="1" dirty="0">
                 <a:solidFill>
                   <a:srgbClr val="FFFFFF"/>
                 </a:solidFill>
@@ -26757,7 +27007,7 @@
               <a:t>. </a:t>
             </a:r>
             <a:r>
-              <a:rPr lang="ko-KR" altLang="en-US" sz="2200" b="1" dirty="0">
+              <a:rPr lang="ko-KR" altLang="en-US" sz="1700" b="1" dirty="0">
                 <a:solidFill>
                   <a:srgbClr val="FFFFFF"/>
                 </a:solidFill>
@@ -26768,7 +27018,7 @@
               <a:t>한국 음식을 먹었어요</a:t>
             </a:r>
             <a:r>
-              <a:rPr lang="en-US" sz="2200" b="1" dirty="0">
+              <a:rPr lang="en-US" sz="1700" b="1" dirty="0">
                 <a:solidFill>
                   <a:srgbClr val="FFFFFF"/>
                 </a:solidFill>
@@ -26776,7 +27026,7 @@
               <a:t>. </a:t>
             </a:r>
             <a:r>
-              <a:rPr lang="ko-KR" altLang="en-US" sz="2200" b="1" dirty="0">
+              <a:rPr lang="ko-KR" altLang="en-US" sz="1700" b="1" dirty="0">
                 <a:solidFill>
                   <a:srgbClr val="FFFFFF"/>
                 </a:solidFill>
@@ -26787,14 +27037,14 @@
               <a:t>정말 맛있었어요</a:t>
             </a:r>
             <a:r>
-              <a:rPr lang="en-US" sz="2200" b="1" dirty="0">
+              <a:rPr lang="en-US" sz="1700" b="1" dirty="0">
                 <a:solidFill>
                   <a:srgbClr val="FFFFFF"/>
                 </a:solidFill>
               </a:rPr>
               <a:t>!</a:t>
             </a:r>
-            <a:endParaRPr lang="en-US" sz="2200" dirty="0"/>
+            <a:endParaRPr lang="en-US" sz="1700" dirty="0"/>
           </a:p>
         </p:txBody>
       </p:sp>
@@ -26885,7 +27135,7 @@
                                           </p:stCondLst>
                                         </p:cTn>
                                         <p:tgtEl>
-                                          <p:spTgt spid="7"/>
+                                          <p:spTgt spid="9"/>
                                         </p:tgtEl>
                                         <p:attrNameLst>
                                           <p:attrName>style.visibility</p:attrName>
@@ -26912,7 +27162,7 @@
                                           </p:stCondLst>
                                         </p:cTn>
                                         <p:tgtEl>
-                                          <p:spTgt spid="8"/>
+                                          <p:spTgt spid="10"/>
                                         </p:tgtEl>
                                         <p:attrNameLst>
                                           <p:attrName>style.visibility</p:attrName>
@@ -26957,7 +27207,7 @@
                                           </p:stCondLst>
                                         </p:cTn>
                                         <p:tgtEl>
-                                          <p:spTgt spid="12"/>
+                                          <p:spTgt spid="16"/>
                                         </p:tgtEl>
                                         <p:attrNameLst>
                                           <p:attrName>style.visibility</p:attrName>
@@ -26984,7 +27234,7 @@
                                           </p:stCondLst>
                                         </p:cTn>
                                         <p:tgtEl>
-                                          <p:spTgt spid="13"/>
+                                          <p:spTgt spid="17"/>
                                         </p:tgtEl>
                                         <p:attrNameLst>
                                           <p:attrName>style.visibility</p:attrName>
@@ -27029,7 +27279,7 @@
                                           </p:stCondLst>
                                         </p:cTn>
                                         <p:tgtEl>
-                                          <p:spTgt spid="17"/>
+                                          <p:spTgt spid="23"/>
                                         </p:tgtEl>
                                         <p:attrNameLst>
                                           <p:attrName>style.visibility</p:attrName>
@@ -27056,7 +27306,7 @@
                                           </p:stCondLst>
                                         </p:cTn>
                                         <p:tgtEl>
-                                          <p:spTgt spid="18"/>
+                                          <p:spTgt spid="24"/>
                                         </p:tgtEl>
                                         <p:attrNameLst>
                                           <p:attrName>style.visibility</p:attrName>
@@ -27097,9 +27347,9 @@
       </p:par>
     </p:tnLst>
     <p:bldLst>
-      <p:bldP spid="8" grpId="0" animBg="1"/>
-      <p:bldP spid="13" grpId="0" animBg="1"/>
-      <p:bldP spid="18" grpId="0" animBg="1"/>
+      <p:bldP spid="10" grpId="0" animBg="1"/>
+      <p:bldP spid="17" grpId="0" animBg="1"/>
+      <p:bldP spid="24" grpId="0" animBg="1"/>
     </p:bldLst>
   </p:timing>
 </p:sld>
@@ -27190,7 +27440,7 @@
         <p:spPr>
           <a:xfrm>
             <a:off x="548640" y="1325880"/>
-            <a:ext cx="11064240" cy="548640"/>
+            <a:ext cx="11091672" cy="548640"/>
           </a:xfrm>
           <a:prstGeom prst="rect">
             <a:avLst/>
@@ -27282,16 +27532,40 @@
           </a:p>
         </p:txBody>
       </p:sp>
-      <p:sp>
-        <p:nvSpPr>
-          <p:cNvPr id="6" name="Text 4"/>
+      <p:pic>
+        <p:nvPicPr>
+          <p:cNvPr id="6" name="item_img_0" descr="C:\Users\Chingu\AppData\Local\Temp\claude\C--Users-Chingu-Desktop-ACADEMIASEULWEB\d4111e1b-5523-44ea-97b2-b1a1d9545b9e\scratchpad\decks\cache\img_92c7616cd79c966d.png"/>
+          <p:cNvPicPr>
+            <a:picLocks noChangeAspect="1"/>
+          </p:cNvPicPr>
+          <p:nvPr/>
+        </p:nvPicPr>
+        <p:blipFill>
+          <a:blip r:embed="rId3"/>
+          <a:stretch>
+            <a:fillRect/>
+          </a:stretch>
+        </p:blipFill>
+        <p:spPr>
+          <a:xfrm>
+            <a:off x="1115568" y="1984248"/>
+            <a:ext cx="557784" cy="557784"/>
+          </a:xfrm>
+          <a:prstGeom prst="rect">
+            <a:avLst/>
+          </a:prstGeom>
+        </p:spPr>
+      </p:pic>
+      <p:sp>
+        <p:nvSpPr>
+          <p:cNvPr id="7" name="Text 4"/>
           <p:cNvSpPr txBox="1"/>
           <p:nvPr/>
         </p:nvSpPr>
         <p:spPr>
           <a:xfrm>
-            <a:off x="1188720" y="1965960"/>
-            <a:ext cx="5285232" cy="594360"/>
+            <a:off x="1856232" y="1965960"/>
+            <a:ext cx="4617720" cy="594360"/>
           </a:xfrm>
           <a:prstGeom prst="rect">
             <a:avLst/>
@@ -27322,7 +27596,7 @@
       </p:sp>
       <p:sp>
         <p:nvSpPr>
-          <p:cNvPr id="7" name="rev_11_caja"/>
+          <p:cNvPr id="8" name="rev_11_caja"/>
           <p:cNvSpPr/>
           <p:nvPr/>
         </p:nvSpPr>
@@ -27349,7 +27623,7 @@
       </p:sp>
       <p:sp>
         <p:nvSpPr>
-          <p:cNvPr id="8" name="rev_11_txt"/>
+          <p:cNvPr id="9" name="rev_11_txt"/>
           <p:cNvSpPr txBox="1"/>
           <p:nvPr/>
         </p:nvSpPr>
@@ -27398,7 +27672,7 @@
       </p:sp>
       <p:sp>
         <p:nvSpPr>
-          <p:cNvPr id="9" name="num_1"/>
+          <p:cNvPr id="10" name="num_1"/>
           <p:cNvSpPr/>
           <p:nvPr/>
         </p:nvSpPr>
@@ -27423,7 +27697,7 @@
       </p:sp>
       <p:sp>
         <p:nvSpPr>
-          <p:cNvPr id="10" name="Text 8"/>
+          <p:cNvPr id="11" name="Text 8"/>
           <p:cNvSpPr txBox="1"/>
           <p:nvPr/>
         </p:nvSpPr>
@@ -27459,16 +27733,40 @@
           </a:p>
         </p:txBody>
       </p:sp>
-      <p:sp>
-        <p:nvSpPr>
-          <p:cNvPr id="11" name="Text 9"/>
+      <p:pic>
+        <p:nvPicPr>
+          <p:cNvPr id="12" name="item_img_1" descr="C:\Users\Chingu\AppData\Local\Temp\claude\C--Users-Chingu-Desktop-ACADEMIASEULWEB\d4111e1b-5523-44ea-97b2-b1a1d9545b9e\scratchpad\decks\cache\img_96094c28e2418e34.png"/>
+          <p:cNvPicPr>
+            <a:picLocks noChangeAspect="1"/>
+          </p:cNvPicPr>
+          <p:nvPr/>
+        </p:nvPicPr>
+        <p:blipFill>
+          <a:blip r:embed="rId4"/>
+          <a:stretch>
+            <a:fillRect/>
+          </a:stretch>
+        </p:blipFill>
+        <p:spPr>
+          <a:xfrm>
+            <a:off x="1115568" y="2706624"/>
+            <a:ext cx="557784" cy="557784"/>
+          </a:xfrm>
+          <a:prstGeom prst="rect">
+            <a:avLst/>
+          </a:prstGeom>
+        </p:spPr>
+      </p:pic>
+      <p:sp>
+        <p:nvSpPr>
+          <p:cNvPr id="13" name="Text 9"/>
           <p:cNvSpPr txBox="1"/>
           <p:nvPr/>
         </p:nvSpPr>
         <p:spPr>
           <a:xfrm>
-            <a:off x="1188720" y="2688336"/>
-            <a:ext cx="5285232" cy="594360"/>
+            <a:off x="1856232" y="2688336"/>
+            <a:ext cx="4617720" cy="594360"/>
           </a:xfrm>
           <a:prstGeom prst="rect">
             <a:avLst/>
@@ -27499,7 +27797,7 @@
       </p:sp>
       <p:sp>
         <p:nvSpPr>
-          <p:cNvPr id="12" name="rev_12_caja"/>
+          <p:cNvPr id="14" name="rev_12_caja"/>
           <p:cNvSpPr/>
           <p:nvPr/>
         </p:nvSpPr>
@@ -27526,7 +27824,7 @@
       </p:sp>
       <p:sp>
         <p:nvSpPr>
-          <p:cNvPr id="13" name="rev_12_txt"/>
+          <p:cNvPr id="15" name="rev_12_txt"/>
           <p:cNvSpPr txBox="1"/>
           <p:nvPr/>
         </p:nvSpPr>
@@ -27594,7 +27892,7 @@
       </p:sp>
       <p:sp>
         <p:nvSpPr>
-          <p:cNvPr id="14" name="num_2"/>
+          <p:cNvPr id="16" name="num_2"/>
           <p:cNvSpPr/>
           <p:nvPr/>
         </p:nvSpPr>
@@ -27619,7 +27917,7 @@
       </p:sp>
       <p:sp>
         <p:nvSpPr>
-          <p:cNvPr id="15" name="Text 13"/>
+          <p:cNvPr id="17" name="Text 13"/>
           <p:cNvSpPr txBox="1"/>
           <p:nvPr/>
         </p:nvSpPr>
@@ -27655,16 +27953,40 @@
           </a:p>
         </p:txBody>
       </p:sp>
-      <p:sp>
-        <p:nvSpPr>
-          <p:cNvPr id="16" name="Text 14"/>
+      <p:pic>
+        <p:nvPicPr>
+          <p:cNvPr id="18" name="item_img_2" descr="C:\Users\Chingu\AppData\Local\Temp\claude\C--Users-Chingu-Desktop-ACADEMIASEULWEB\d4111e1b-5523-44ea-97b2-b1a1d9545b9e\scratchpad\decks\cache\img_79bbf46c5c613db4.png"/>
+          <p:cNvPicPr>
+            <a:picLocks noChangeAspect="1"/>
+          </p:cNvPicPr>
+          <p:nvPr/>
+        </p:nvPicPr>
+        <p:blipFill>
+          <a:blip r:embed="rId5"/>
+          <a:stretch>
+            <a:fillRect/>
+          </a:stretch>
+        </p:blipFill>
+        <p:spPr>
+          <a:xfrm>
+            <a:off x="1115568" y="3429000"/>
+            <a:ext cx="557784" cy="557784"/>
+          </a:xfrm>
+          <a:prstGeom prst="rect">
+            <a:avLst/>
+          </a:prstGeom>
+        </p:spPr>
+      </p:pic>
+      <p:sp>
+        <p:nvSpPr>
+          <p:cNvPr id="19" name="Text 14"/>
           <p:cNvSpPr txBox="1"/>
           <p:nvPr/>
         </p:nvSpPr>
         <p:spPr>
           <a:xfrm>
-            <a:off x="1188720" y="3410712"/>
-            <a:ext cx="5285232" cy="594360"/>
+            <a:off x="1856232" y="3410712"/>
+            <a:ext cx="4617720" cy="594360"/>
           </a:xfrm>
           <a:prstGeom prst="rect">
             <a:avLst/>
@@ -27695,7 +28017,7 @@
       </p:sp>
       <p:sp>
         <p:nvSpPr>
-          <p:cNvPr id="17" name="rev_13_caja"/>
+          <p:cNvPr id="20" name="rev_13_caja"/>
           <p:cNvSpPr/>
           <p:nvPr/>
         </p:nvSpPr>
@@ -27722,7 +28044,7 @@
       </p:sp>
       <p:sp>
         <p:nvSpPr>
-          <p:cNvPr id="18" name="rev_13_txt"/>
+          <p:cNvPr id="21" name="rev_13_txt"/>
           <p:cNvSpPr txBox="1"/>
           <p:nvPr/>
         </p:nvSpPr>
@@ -27809,7 +28131,7 @@
       </p:sp>
       <p:sp>
         <p:nvSpPr>
-          <p:cNvPr id="19" name="num_3"/>
+          <p:cNvPr id="22" name="num_3"/>
           <p:cNvSpPr/>
           <p:nvPr/>
         </p:nvSpPr>
@@ -27834,7 +28156,7 @@
       </p:sp>
       <p:sp>
         <p:nvSpPr>
-          <p:cNvPr id="20" name="Text 18"/>
+          <p:cNvPr id="23" name="Text 18"/>
           <p:cNvSpPr txBox="1"/>
           <p:nvPr/>
         </p:nvSpPr>
@@ -27872,14 +28194,14 @@
       </p:sp>
       <p:sp>
         <p:nvSpPr>
-          <p:cNvPr id="21" name="Text 19"/>
+          <p:cNvPr id="24" name="Text 19"/>
           <p:cNvSpPr txBox="1"/>
           <p:nvPr/>
         </p:nvSpPr>
         <p:spPr>
           <a:xfrm>
-            <a:off x="1188720" y="4133088"/>
-            <a:ext cx="5285232" cy="594360"/>
+            <a:off x="1856232" y="4133088"/>
+            <a:ext cx="4617720" cy="594360"/>
           </a:xfrm>
           <a:prstGeom prst="rect">
             <a:avLst/>
@@ -27897,7 +28219,7 @@
               <a:buNone/>
             </a:pPr>
             <a:r>
-              <a:rPr lang="ko-KR" altLang="en-US" sz="2400" dirty="0">
+              <a:rPr lang="ko-KR" altLang="en-US" sz="1900" dirty="0">
                 <a:solidFill>
                   <a:srgbClr val="14142B"/>
                 </a:solidFill>
@@ -27908,20 +28230,20 @@
               <a:t>선생님은 토요일 아침에 뭐 했어요</a:t>
             </a:r>
             <a:r>
-              <a:rPr lang="en-US" sz="2400" dirty="0">
+              <a:rPr lang="en-US" sz="1900" dirty="0">
                 <a:solidFill>
                   <a:srgbClr val="14142B"/>
                 </a:solidFill>
               </a:rPr>
               <a:t>?</a:t>
             </a:r>
-            <a:endParaRPr lang="en-US" sz="2400" dirty="0"/>
+            <a:endParaRPr lang="en-US" sz="1900" dirty="0"/>
           </a:p>
         </p:txBody>
       </p:sp>
       <p:sp>
         <p:nvSpPr>
-          <p:cNvPr id="22" name="rev_14_caja"/>
+          <p:cNvPr id="25" name="rev_14_caja"/>
           <p:cNvSpPr/>
           <p:nvPr/>
         </p:nvSpPr>
@@ -27948,7 +28270,7 @@
       </p:sp>
       <p:sp>
         <p:nvSpPr>
-          <p:cNvPr id="23" name="rev_14_txt"/>
+          <p:cNvPr id="26" name="rev_14_txt"/>
           <p:cNvSpPr txBox="1"/>
           <p:nvPr/>
         </p:nvSpPr>
@@ -28016,7 +28338,7 @@
       </p:sp>
       <p:sp>
         <p:nvSpPr>
-          <p:cNvPr id="24" name="num_4"/>
+          <p:cNvPr id="27" name="num_4"/>
           <p:cNvSpPr/>
           <p:nvPr/>
         </p:nvSpPr>
@@ -28041,7 +28363,7 @@
       </p:sp>
       <p:sp>
         <p:nvSpPr>
-          <p:cNvPr id="25" name="Text 23"/>
+          <p:cNvPr id="28" name="Text 23"/>
           <p:cNvSpPr txBox="1"/>
           <p:nvPr/>
         </p:nvSpPr>
@@ -28079,14 +28401,14 @@
       </p:sp>
       <p:sp>
         <p:nvSpPr>
-          <p:cNvPr id="26" name="Text 24"/>
+          <p:cNvPr id="29" name="Text 24"/>
           <p:cNvSpPr txBox="1"/>
           <p:nvPr/>
         </p:nvSpPr>
         <p:spPr>
           <a:xfrm>
-            <a:off x="1188720" y="4855464"/>
-            <a:ext cx="5285232" cy="594360"/>
+            <a:off x="1856232" y="4855464"/>
+            <a:ext cx="4617720" cy="594360"/>
           </a:xfrm>
           <a:prstGeom prst="rect">
             <a:avLst/>
@@ -28128,7 +28450,7 @@
       </p:sp>
       <p:sp>
         <p:nvSpPr>
-          <p:cNvPr id="27" name="rev_15_caja"/>
+          <p:cNvPr id="30" name="rev_15_caja"/>
           <p:cNvSpPr/>
           <p:nvPr/>
         </p:nvSpPr>
@@ -28155,7 +28477,7 @@
       </p:sp>
       <p:sp>
         <p:nvSpPr>
-          <p:cNvPr id="28" name="rev_15_txt"/>
+          <p:cNvPr id="31" name="rev_15_txt"/>
           <p:cNvSpPr txBox="1"/>
           <p:nvPr/>
         </p:nvSpPr>
@@ -28196,7 +28518,7 @@
       </p:sp>
       <p:sp>
         <p:nvSpPr>
-          <p:cNvPr id="29" name="num_5"/>
+          <p:cNvPr id="32" name="num_5"/>
           <p:cNvSpPr/>
           <p:nvPr/>
         </p:nvSpPr>
@@ -28221,7 +28543,7 @@
       </p:sp>
       <p:sp>
         <p:nvSpPr>
-          <p:cNvPr id="30" name="Text 28"/>
+          <p:cNvPr id="33" name="Text 28"/>
           <p:cNvSpPr txBox="1"/>
           <p:nvPr/>
         </p:nvSpPr>
@@ -28259,14 +28581,14 @@
       </p:sp>
       <p:sp>
         <p:nvSpPr>
-          <p:cNvPr id="31" name="Text 29"/>
+          <p:cNvPr id="34" name="Text 29"/>
           <p:cNvSpPr txBox="1"/>
           <p:nvPr/>
         </p:nvSpPr>
         <p:spPr>
           <a:xfrm>
-            <a:off x="1188720" y="5577840"/>
-            <a:ext cx="5285232" cy="594360"/>
+            <a:off x="1856232" y="5577840"/>
+            <a:ext cx="4617720" cy="594360"/>
           </a:xfrm>
           <a:prstGeom prst="rect">
             <a:avLst/>
@@ -28284,7 +28606,7 @@
               <a:buNone/>
             </a:pPr>
             <a:r>
-              <a:rPr lang="ko-KR" altLang="en-US" sz="2400" dirty="0">
+              <a:rPr lang="ko-KR" altLang="en-US" sz="1900" dirty="0">
                 <a:solidFill>
                   <a:srgbClr val="14142B"/>
                 </a:solidFill>
@@ -28295,20 +28617,20 @@
               <a:t>몇 시부터 몇 시까지 카페에 있었어요</a:t>
             </a:r>
             <a:r>
-              <a:rPr lang="en-US" sz="2400" dirty="0">
+              <a:rPr lang="en-US" sz="1900" dirty="0">
                 <a:solidFill>
                   <a:srgbClr val="14142B"/>
                 </a:solidFill>
               </a:rPr>
               <a:t>?</a:t>
             </a:r>
-            <a:endParaRPr lang="en-US" sz="2400" dirty="0"/>
+            <a:endParaRPr lang="en-US" sz="1900" dirty="0"/>
           </a:p>
         </p:txBody>
       </p:sp>
       <p:sp>
         <p:nvSpPr>
-          <p:cNvPr id="32" name="rev_16_caja"/>
+          <p:cNvPr id="35" name="rev_16_caja"/>
           <p:cNvSpPr/>
           <p:nvPr/>
         </p:nvSpPr>
@@ -28335,7 +28657,7 @@
       </p:sp>
       <p:sp>
         <p:nvSpPr>
-          <p:cNvPr id="33" name="rev_16_txt"/>
+          <p:cNvPr id="36" name="rev_16_txt"/>
           <p:cNvSpPr txBox="1"/>
           <p:nvPr/>
         </p:nvSpPr>
@@ -28368,7 +28690,7 @@
                 <a:ea typeface="Malgun Gothic" pitchFamily="34" charset="-122"/>
                 <a:cs typeface="Malgun Gothic" pitchFamily="34" charset="-120"/>
               </a:rPr>
-              <a:t>열한 시부터 한 시까지</a:t>
+              <a:t>열한 시부터 한 시까지</a:t>
             </a:r>
             <a:endParaRPr lang="en-US" sz="2200" dirty="0"/>
           </a:p>
@@ -28376,7 +28698,7 @@
       </p:sp>
       <p:sp>
         <p:nvSpPr>
-          <p:cNvPr id="34" name="Slide Number Placeholder 0"/>
+          <p:cNvPr id="37" name="Slide Number Placeholder 0"/>
           <p:cNvSpPr>
             <a:spLocks noGrp="1"/>
           </p:cNvSpPr>
@@ -28461,7 +28783,7 @@
                                           </p:stCondLst>
                                         </p:cTn>
                                         <p:tgtEl>
-                                          <p:spTgt spid="7"/>
+                                          <p:spTgt spid="8"/>
                                         </p:tgtEl>
                                         <p:attrNameLst>
                                           <p:attrName>style.visibility</p:attrName>
@@ -28488,7 +28810,7 @@
                                           </p:stCondLst>
                                         </p:cTn>
                                         <p:tgtEl>
-                                          <p:spTgt spid="8"/>
+                                          <p:spTgt spid="9"/>
                                         </p:tgtEl>
                                         <p:attrNameLst>
                                           <p:attrName>style.visibility</p:attrName>
@@ -28533,7 +28855,7 @@
                                           </p:stCondLst>
                                         </p:cTn>
                                         <p:tgtEl>
-                                          <p:spTgt spid="12"/>
+                                          <p:spTgt spid="14"/>
                                         </p:tgtEl>
                                         <p:attrNameLst>
                                           <p:attrName>style.visibility</p:attrName>
@@ -28560,7 +28882,7 @@
                                           </p:stCondLst>
                                         </p:cTn>
                                         <p:tgtEl>
-                                          <p:spTgt spid="13"/>
+                                          <p:spTgt spid="15"/>
                                         </p:tgtEl>
                                         <p:attrNameLst>
                                           <p:attrName>style.visibility</p:attrName>
@@ -28605,7 +28927,7 @@
                                           </p:stCondLst>
                                         </p:cTn>
                                         <p:tgtEl>
-                                          <p:spTgt spid="17"/>
+                                          <p:spTgt spid="20"/>
                                         </p:tgtEl>
                                         <p:attrNameLst>
                                           <p:attrName>style.visibility</p:attrName>
@@ -28632,7 +28954,7 @@
                                           </p:stCondLst>
                                         </p:cTn>
                                         <p:tgtEl>
-                                          <p:spTgt spid="18"/>
+                                          <p:spTgt spid="21"/>
                                         </p:tgtEl>
                                         <p:attrNameLst>
                                           <p:attrName>style.visibility</p:attrName>
@@ -28677,7 +28999,7 @@
                                           </p:stCondLst>
                                         </p:cTn>
                                         <p:tgtEl>
-                                          <p:spTgt spid="22"/>
+                                          <p:spTgt spid="25"/>
                                         </p:tgtEl>
                                         <p:attrNameLst>
                                           <p:attrName>style.visibility</p:attrName>
@@ -28704,7 +29026,7 @@
                                           </p:stCondLst>
                                         </p:cTn>
                                         <p:tgtEl>
-                                          <p:spTgt spid="23"/>
+                                          <p:spTgt spid="26"/>
                                         </p:tgtEl>
                                         <p:attrNameLst>
                                           <p:attrName>style.visibility</p:attrName>
@@ -28749,7 +29071,7 @@
                                           </p:stCondLst>
                                         </p:cTn>
                                         <p:tgtEl>
-                                          <p:spTgt spid="27"/>
+                                          <p:spTgt spid="30"/>
                                         </p:tgtEl>
                                         <p:attrNameLst>
                                           <p:attrName>style.visibility</p:attrName>
@@ -28776,7 +29098,7 @@
                                           </p:stCondLst>
                                         </p:cTn>
                                         <p:tgtEl>
-                                          <p:spTgt spid="28"/>
+                                          <p:spTgt spid="31"/>
                                         </p:tgtEl>
                                         <p:attrNameLst>
                                           <p:attrName>style.visibility</p:attrName>
@@ -28821,7 +29143,7 @@
                                           </p:stCondLst>
                                         </p:cTn>
                                         <p:tgtEl>
-                                          <p:spTgt spid="32"/>
+                                          <p:spTgt spid="35"/>
                                         </p:tgtEl>
                                         <p:attrNameLst>
                                           <p:attrName>style.visibility</p:attrName>
@@ -28848,7 +29170,7 @@
                                           </p:stCondLst>
                                         </p:cTn>
                                         <p:tgtEl>
-                                          <p:spTgt spid="33"/>
+                                          <p:spTgt spid="36"/>
                                         </p:tgtEl>
                                         <p:attrNameLst>
                                           <p:attrName>style.visibility</p:attrName>
@@ -28889,12 +29211,12 @@
       </p:par>
     </p:tnLst>
     <p:bldLst>
-      <p:bldP spid="8" grpId="0" animBg="1"/>
-      <p:bldP spid="13" grpId="0" animBg="1"/>
-      <p:bldP spid="18" grpId="0" animBg="1"/>
-      <p:bldP spid="23" grpId="0" animBg="1"/>
-      <p:bldP spid="28" grpId="0" animBg="1"/>
-      <p:bldP spid="33" grpId="0" animBg="1"/>
+      <p:bldP spid="9" grpId="0" animBg="1"/>
+      <p:bldP spid="15" grpId="0" animBg="1"/>
+      <p:bldP spid="21" grpId="0" animBg="1"/>
+      <p:bldP spid="26" grpId="0" animBg="1"/>
+      <p:bldP spid="31" grpId="0" animBg="1"/>
+      <p:bldP spid="36" grpId="0" animBg="1"/>
     </p:bldLst>
   </p:timing>
 </p:sld>
@@ -28974,7 +29296,7 @@
         <p:spPr>
           <a:xfrm>
             <a:off x="548640" y="1325880"/>
-            <a:ext cx="6949440" cy="548640"/>
+            <a:ext cx="5669280" cy="548640"/>
           </a:xfrm>
           <a:prstGeom prst="rect">
             <a:avLst/>
@@ -29012,7 +29334,7 @@
         <p:spPr>
           <a:xfrm>
             <a:off x="548640" y="1965960"/>
-            <a:ext cx="6949440" cy="4206240"/>
+            <a:ext cx="5669280" cy="4206240"/>
           </a:xfrm>
           <a:prstGeom prst="rect">
             <a:avLst/>
@@ -29034,14 +29356,14 @@
               <a:buChar char="•"/>
             </a:pPr>
             <a:r>
-              <a:rPr lang="en-US" sz="2400" dirty="0">
+              <a:rPr lang="en-US" sz="2800" dirty="0">
                 <a:solidFill>
                   <a:srgbClr val="14142B"/>
                 </a:solidFill>
               </a:rPr>
               <a:t>1 dedo a la cámara = presente</a:t>
             </a:r>
-            <a:endParaRPr lang="en-US" sz="2400" dirty="0"/>
+            <a:endParaRPr lang="en-US" sz="2800" dirty="0"/>
           </a:p>
           <a:p>
             <a:pPr marL="228600" indent="-228600" eaLnBrk="1">
@@ -29052,14 +29374,14 @@
               <a:buChar char="•"/>
             </a:pPr>
             <a:r>
-              <a:rPr lang="en-US" sz="2400" dirty="0">
+              <a:rPr lang="en-US" sz="2800" dirty="0">
                 <a:solidFill>
                   <a:srgbClr val="14142B"/>
                 </a:solidFill>
               </a:rPr>
               <a:t>2 dedos = pasado</a:t>
             </a:r>
-            <a:endParaRPr lang="en-US" sz="2400" dirty="0"/>
+            <a:endParaRPr lang="en-US" sz="2800" dirty="0"/>
           </a:p>
         </p:txBody>
       </p:sp>
@@ -29071,12 +29393,12 @@
         </p:nvSpPr>
         <p:spPr>
           <a:xfrm>
-            <a:off x="8001000" y="1417320"/>
-            <a:ext cx="3611880" cy="4480560"/>
+            <a:off x="6446520" y="1371600"/>
+            <a:ext cx="5193792" cy="4800600"/>
           </a:xfrm>
           <a:prstGeom prst="roundRect">
             <a:avLst>
-              <a:gd name="adj" fmla="val 6329"/>
+              <a:gd name="adj" fmla="val 4762"/>
             </a:avLst>
           </a:prstGeom>
           <a:solidFill>
@@ -29090,58 +29412,30 @@
           </a:ln>
         </p:spPr>
       </p:sp>
-      <p:sp>
-        <p:nvSpPr>
-          <p:cNvPr id="6" name="imagen_pendiente"/>
-          <p:cNvSpPr txBox="1"/>
+      <p:pic>
+        <p:nvPicPr>
+          <p:cNvPr id="6" name="imagen" descr="C:\Users\Chingu\AppData\Local\Temp\claude\C--Users-Chingu-Desktop-ACADEMIASEULWEB\d4111e1b-5523-44ea-97b2-b1a1d9545b9e\scratchpad\decks\cache\img_f6190ef148c34928.png"/>
+          <p:cNvPicPr>
+            <a:picLocks noChangeAspect="1"/>
+          </p:cNvPicPr>
           <p:nvPr/>
-        </p:nvSpPr>
-        <p:spPr>
-          <a:xfrm>
-            <a:off x="8183880" y="1600200"/>
-            <a:ext cx="3246120" cy="4114800"/>
+        </p:nvPicPr>
+        <p:blipFill>
+          <a:blip r:embed="rId3"/>
+          <a:stretch>
+            <a:fillRect/>
+          </a:stretch>
+        </p:blipFill>
+        <p:spPr>
+          <a:xfrm>
+            <a:off x="7040833" y="1463040"/>
+            <a:ext cx="4005165" cy="4617720"/>
           </a:xfrm>
           <a:prstGeom prst="rect">
             <a:avLst/>
           </a:prstGeom>
-          <a:noFill/>
-          <a:ln/>
-        </p:spPr>
-        <p:txBody>
-          <a:bodyPr wrap="square" lIns="76200" tIns="76200" rIns="76200" bIns="76200" rtlCol="0" anchor="ctr">
-            <a:normAutofit/>
-          </a:bodyPr>
-          <a:lstStyle/>
-          <a:p>
-            <a:pPr marL="0" indent="0" algn="ctr" eaLnBrk="1">
-              <a:buNone/>
-            </a:pPr>
-            <a:r>
-              <a:rPr lang="en-US" sz="1600" b="1" dirty="0">
-                <a:solidFill>
-                  <a:srgbClr val="4236F6"/>
-                </a:solidFill>
-              </a:rPr>
-              <a:t>Imagen pendiente</a:t>
-            </a:r>
-            <a:endParaRPr lang="en-US" sz="1600" dirty="0"/>
-          </a:p>
-          <a:p>
-            <a:pPr marL="0" indent="0" algn="ctr" eaLnBrk="1">
-              <a:buNone/>
-            </a:pPr>
-            <a:r>
-              <a:rPr lang="en-US" sz="1300" dirty="0">
-                <a:solidFill>
-                  <a:srgbClr val="5C5F6B"/>
-                </a:solidFill>
-              </a:rPr>
-              <a:t>Dos manos dibujadas: una con 1 dedo (presente) y otra con 2 dedos (pasado)</a:t>
-            </a:r>
-            <a:endParaRPr lang="en-US" sz="1600" dirty="0"/>
-          </a:p>
-        </p:txBody>
-      </p:sp>
+        </p:spPr>
+      </p:pic>
       <p:sp>
         <p:nvSpPr>
           <p:cNvPr id="25" name="Slide Number Placeholder 0"/>

--- a/Curriculo/Fase3_Basico2/decks/Basico2_S04_Jay.pptx
+++ b/Curriculo/Fase3_Basico2/decks/Basico2_S04_Jay.pptx
@@ -136,7 +136,7 @@
   <p:extLst>
     <p:ext uri="{521415D9-36F7-43E2-AB2F-B90AF26B5E84}">
       <p14:sectionLst xmlns:p14="http://schemas.microsoft.com/office/powerpoint/2010/main">
-        <p14:section name="Semana 4" id="{CEA05433-0292-39C5-7F8B-ADED3F0447F7}">
+        <p14:section name="Semana 4" id="{1FD53434-7A2F-92A2-C84A-DC418E193698}">
           <p14:sldIdLst>
             <p14:sldId id="256"/>
             <p14:sldId id="257"/>
@@ -204,7 +204,7 @@
     </p:spTree>
     <p:extLst>
       <p:ext uri="{BB962C8B-B14F-4D97-AF65-F5344CB8AC3E}">
-        <p14:creationId xmlns:p14="http://schemas.microsoft.com/office/powerpoint/2010/main" val="1359845677"/>
+        <p14:creationId xmlns:p14="http://schemas.microsoft.com/office/powerpoint/2010/main" val="2156182237"/>
       </p:ext>
     </p:extLst>
   </p:cSld>
@@ -2045,7 +2045,7 @@
           <a:p>
             <a:r>
               <a:rPr lang="en-US" dirty="0"/>
-              <a:t>21:58 · 1:15 (con L28). «Unos 28 minutos, antes de la clase 5, el miércoles 11. Uno: el mini-diario, tres frases en pasado sobre tu día, aquí en el grupo. Dos: el Lector, Números, tres rondas seguidas cuando arriba diga ‘nativos’ o ‘mezclados’, y la captura. Tres: la Hoja 4, ejercicios 9 y 10. Cuatro: elige un lugar al que quieras viajar y guarda una foto.» Si arriba dice «sino-coreanos», la juegan igual hasta que cambie.
+              <a:t>21:58 · 1:15 (con L28). «Unos 28 minutos, antes de la clase 5, el miércoles 18. Uno: el mini-diario, tres frases en pasado sobre tu día, aquí en el grupo. Dos: el Lector, Números, tres rondas seguidas cuando arriba diga ‘nativos’ o ‘mezclados’, y la captura. Tres: la Hoja 4, ejercicios 9 y 10. Cuatro: elige un lugar al que quieras viajar y guarda una foto.» Si arriba dice «sino-coreanos», la juegan igual hasta que cambie.
 Fuente: Nueva
 Lámina 27</a:t>
             </a:r>
@@ -2134,7 +2134,7 @@
           <a:p>
             <a:r>
               <a:rPr lang="en-US" dirty="0"/>
-              <a:t>21:59. «Y la mitad del curso: el domingo 8 les llega la guía de estudio de las semanas 1 a 4 y a cada uno, por privado, mi comentario en tres líneas. Desde la clase 5, parejas nuevas.» (Plazo del comentario: DECISIÓN DE JAY 8.)
+              <a:t>21:59. «Y la mitad del curso: el domingo 15 les llega la guía de estudio de las semanas 1 a 4 y a cada uno, por privado, mi comentario en tres líneas. Desde la clase 5, parejas nuevas.» (Plazo del comentario: DECISIÓN DE JAY 8.)
 Fuente: Nueva
 Lámina 28</a:t>
             </a:r>
@@ -2490,8 +2490,8 @@
           <a:p>
             <a:r>
               <a:rPr lang="en-US" dirty="0"/>
-              <a:t>21:03:30–21:04:15 · 45 s. «Del quiz en línea, lo que más costó fue esto.» Se llena el martes 3 con el resumen del formulario: deja los 2 ítems con más errores (estos 3 son los más probables si no hay datos). Una frase por ítem. «La clave completa de la Hoja 3 queda en la carpeta con la grabación.»
-Fuente: Nueva (se llena el martes 3 de noviembre)
+              <a:t>21:03:30–21:04:15 · 45 s. «Del quiz en línea, lo que más costó fue esto.» Se llena el martes 10 con el resumen del formulario: deja los 2 ítems con más errores (estos 3 son los más probables si no hay datos). Una frase por ítem. «La clave completa de la Hoja 3 queda en la carpeta con la grabación.»
+Fuente: Nueva (se llena el martes 10 de noviembre)
 Lámina 4</a:t>
             </a:r>
           </a:p>
@@ -2757,7 +2757,7 @@
           <a:p>
             <a:r>
               <a:rPr lang="en-US" dirty="0"/>
-              <a:t>21:06–21:07. Una frase por foto, despacio, señalando; haz clic para que la frase aparezca después de decirla. Es un guion de ejemplo (revisar S4-2): cámbialo por tu fin de semana real (sáb 31 oct – dom 1 nov) y conserva un 부터~까지, un 하고 y un adjetivo (맛있었어요 / 피곤했어요).
+              <a:t>21:06–21:07. Una frase por foto, despacio, señalando; haz clic para que la frase aparezca después de decirla. Es un guion de ejemplo (revisar S4-2): cámbialo por tu fin de semana real (sáb 7 – dom 8 nov) y conserva un 부터~까지, un 하고 y un adjetivo (맛있었어요 / 피곤했어요).
 Imagen: incluida (dibujo de la casa).
 Fuente: Nueva (fotos de Jay)
 Lámina 7</a:t>
@@ -4100,7 +4100,7 @@
                   <a:srgbClr val="14142B"/>
                 </a:solidFill>
               </a:rPr>
-              <a:t>EE.UU. (Este) 19:00, cambió la hora el domingo 1 · España 01:00 (jueves)</a:t>
+              <a:t>EE.UU. (Este) 19:00 (desde el domingo 1 de noviembre) · España 01:00 (jueves)</a:t>
             </a:r>
             <a:endParaRPr lang="en-US" sz="2400" dirty="0"/>
           </a:p>
@@ -4118,7 +4118,7 @@
                   <a:srgbClr val="14142B"/>
                 </a:solidFill>
               </a:rPr>
-              <a:t>Corea: jueves 5, 09:00</a:t>
+              <a:t>Corea: jueves 12, 09:00</a:t>
             </a:r>
             <a:endParaRPr lang="en-US" sz="2400" dirty="0"/>
           </a:p>
@@ -4499,7 +4499,7 @@
           <p:nvPr>
             <p:extLst>
               <p:ext uri="{D42A27DB-BD31-4B8C-83A1-F6EECF244321}">
-                <p14:modId xmlns:p14="http://schemas.microsoft.com/office/powerpoint/2010/main" val="3386344859"/>
+                <p14:modId xmlns:p14="http://schemas.microsoft.com/office/powerpoint/2010/main" val="2594023046"/>
               </p:ext>
             </p:extLst>
           </p:nvPr>
@@ -6453,7 +6453,7 @@
           <p:nvPr>
             <p:extLst>
               <p:ext uri="{D42A27DB-BD31-4B8C-83A1-F6EECF244321}">
-                <p14:modId xmlns:p14="http://schemas.microsoft.com/office/powerpoint/2010/main" val="3238273321"/>
+                <p14:modId xmlns:p14="http://schemas.microsoft.com/office/powerpoint/2010/main" val="3334582741"/>
               </p:ext>
             </p:extLst>
           </p:nvPr>
@@ -7869,7 +7869,7 @@
           <p:nvPr>
             <p:extLst>
               <p:ext uri="{D42A27DB-BD31-4B8C-83A1-F6EECF244321}">
-                <p14:modId xmlns:p14="http://schemas.microsoft.com/office/powerpoint/2010/main" val="2203676796"/>
+                <p14:modId xmlns:p14="http://schemas.microsoft.com/office/powerpoint/2010/main" val="2081566219"/>
               </p:ext>
             </p:extLst>
           </p:nvPr>
@@ -10673,7 +10673,7 @@
           <p:nvPr>
             <p:extLst>
               <p:ext uri="{D42A27DB-BD31-4B8C-83A1-F6EECF244321}">
-                <p14:modId xmlns:p14="http://schemas.microsoft.com/office/powerpoint/2010/main" val="3952557176"/>
+                <p14:modId xmlns:p14="http://schemas.microsoft.com/office/powerpoint/2010/main" val="3787527500"/>
               </p:ext>
             </p:extLst>
           </p:nvPr>
@@ -15321,7 +15321,7 @@
           <p:nvPr>
             <p:extLst>
               <p:ext uri="{D42A27DB-BD31-4B8C-83A1-F6EECF244321}">
-                <p14:modId xmlns:p14="http://schemas.microsoft.com/office/powerpoint/2010/main" val="2584242079"/>
+                <p14:modId xmlns:p14="http://schemas.microsoft.com/office/powerpoint/2010/main" val="1393905604"/>
               </p:ext>
             </p:extLst>
           </p:nvPr>
@@ -21058,7 +21058,7 @@
                   <a:srgbClr val="4236F6"/>
                 </a:solidFill>
               </a:rPr>
-              <a:t>Plazo: miércoles 11 de noviembre, 21:00 (hora de Chile)</a:t>
+              <a:t>Plazo: miércoles 18 de noviembre, 21:00 (hora de Chile)</a:t>
             </a:r>
             <a:endParaRPr lang="en-US" sz="1800" dirty="0"/>
           </a:p>
@@ -21435,7 +21435,7 @@
                   <a:srgbClr val="14142B"/>
                 </a:solidFill>
               </a:rPr>
-              <a:t>Domingo 8 de noviembre: guía de estudio de las semanas 1 a 4, en el grupo</a:t>
+              <a:t>Domingo 15 de noviembre: guía de estudio de las semanas 1 a 4, en el grupo</a:t>
             </a:r>
             <a:endParaRPr lang="en-US" sz="2400" dirty="0"/>
           </a:p>
@@ -25071,7 +25071,7 @@
                   <a:srgbClr val="E8B84B"/>
                 </a:solidFill>
               </a:rPr>
-              <a:t>Miércoles 4 de noviembre de 2026 · mitad del curso</a:t>
+              <a:t>Miércoles 11 de noviembre de 2026 · mitad del curso</a:t>
             </a:r>
             <a:endParaRPr lang="en-US" sz="2200" dirty="0"/>
           </a:p>
@@ -25159,7 +25159,7 @@
           <p:nvPr>
             <p:extLst>
               <p:ext uri="{D42A27DB-BD31-4B8C-83A1-F6EECF244321}">
-                <p14:modId xmlns:p14="http://schemas.microsoft.com/office/powerpoint/2010/main" val="3743874273"/>
+                <p14:modId xmlns:p14="http://schemas.microsoft.com/office/powerpoint/2010/main" val="2416975870"/>
               </p:ext>
             </p:extLst>
           </p:nvPr>
